--- a/docs/pptx/entire/ritu-entire-linsubhr-ratio-hosp-immune-other_10pct.pptx
+++ b/docs/pptx/entire/ritu-entire-linsubhr-ratio-hosp-immune-other_10pct.pptx
@@ -3433,581 +3433,581 @@
           <p:spPr>
             <a:xfrm>
               <a:off x="1172049" y="2073503"/>
-              <a:ext cx="7090630" cy="3370507"/>
+              <a:ext cx="7090630" cy="3371204"/>
             </a:xfrm>
             <a:custGeom>
               <a:avLst/>
               <a:pathLst>
-                <a:path w="7090630" h="3370507">
+                <a:path w="7090630" h="3371204">
                   <a:moveTo>
-                    <a:pt x="768195" y="0"/>
+                    <a:pt x="776300" y="0"/>
                   </a:moveTo>
                   <a:lnTo>
-                    <a:pt x="787847" y="37425"/>
-                  </a:lnTo>
-                  <a:lnTo>
-                    <a:pt x="859470" y="168625"/>
-                  </a:lnTo>
-                  <a:lnTo>
-                    <a:pt x="931092" y="294830"/>
-                  </a:lnTo>
-                  <a:lnTo>
-                    <a:pt x="1002715" y="416230"/>
-                  </a:lnTo>
-                  <a:lnTo>
-                    <a:pt x="1074337" y="533009"/>
-                  </a:lnTo>
-                  <a:lnTo>
-                    <a:pt x="1145960" y="645343"/>
-                  </a:lnTo>
-                  <a:lnTo>
-                    <a:pt x="1217582" y="753399"/>
-                  </a:lnTo>
-                  <a:lnTo>
-                    <a:pt x="1289205" y="857342"/>
-                  </a:lnTo>
-                  <a:lnTo>
-                    <a:pt x="1360827" y="957329"/>
-                  </a:lnTo>
-                  <a:lnTo>
-                    <a:pt x="1432450" y="1053508"/>
-                  </a:lnTo>
-                  <a:lnTo>
-                    <a:pt x="1504073" y="1146026"/>
-                  </a:lnTo>
-                  <a:lnTo>
-                    <a:pt x="1575695" y="1235022"/>
-                  </a:lnTo>
-                  <a:lnTo>
-                    <a:pt x="1647318" y="1320630"/>
-                  </a:lnTo>
-                  <a:lnTo>
-                    <a:pt x="1718940" y="1402979"/>
-                  </a:lnTo>
-                  <a:lnTo>
-                    <a:pt x="1790563" y="1482193"/>
-                  </a:lnTo>
-                  <a:lnTo>
-                    <a:pt x="1862185" y="1558391"/>
-                  </a:lnTo>
-                  <a:lnTo>
-                    <a:pt x="1933808" y="1631689"/>
-                  </a:lnTo>
-                  <a:lnTo>
-                    <a:pt x="2005430" y="1702196"/>
-                  </a:lnTo>
-                  <a:lnTo>
-                    <a:pt x="2077053" y="1770018"/>
-                  </a:lnTo>
-                  <a:lnTo>
-                    <a:pt x="2148675" y="1835259"/>
-                  </a:lnTo>
-                  <a:lnTo>
-                    <a:pt x="2220298" y="1898016"/>
-                  </a:lnTo>
-                  <a:lnTo>
-                    <a:pt x="2291920" y="1958384"/>
-                  </a:lnTo>
-                  <a:lnTo>
-                    <a:pt x="2363543" y="2016454"/>
-                  </a:lnTo>
-                  <a:lnTo>
-                    <a:pt x="2435165" y="2072313"/>
-                  </a:lnTo>
-                  <a:lnTo>
-                    <a:pt x="2506788" y="2126046"/>
-                  </a:lnTo>
-                  <a:lnTo>
-                    <a:pt x="2578410" y="2177733"/>
-                  </a:lnTo>
-                  <a:lnTo>
-                    <a:pt x="2650033" y="2227452"/>
-                  </a:lnTo>
-                  <a:lnTo>
-                    <a:pt x="2721655" y="2275279"/>
-                  </a:lnTo>
-                  <a:lnTo>
-                    <a:pt x="2793278" y="2321285"/>
-                  </a:lnTo>
-                  <a:lnTo>
-                    <a:pt x="2864901" y="2365539"/>
-                  </a:lnTo>
-                  <a:lnTo>
-                    <a:pt x="2936523" y="2408109"/>
-                  </a:lnTo>
-                  <a:lnTo>
-                    <a:pt x="3008146" y="2449058"/>
-                  </a:lnTo>
-                  <a:lnTo>
-                    <a:pt x="3079768" y="2488448"/>
-                  </a:lnTo>
-                  <a:lnTo>
-                    <a:pt x="3151391" y="2526339"/>
-                  </a:lnTo>
-                  <a:lnTo>
-                    <a:pt x="3223013" y="2562787"/>
-                  </a:lnTo>
-                  <a:lnTo>
-                    <a:pt x="3294636" y="2597847"/>
-                  </a:lnTo>
-                  <a:lnTo>
-                    <a:pt x="3366258" y="2631573"/>
-                  </a:lnTo>
-                  <a:lnTo>
-                    <a:pt x="3437881" y="2656495"/>
-                  </a:lnTo>
-                  <a:lnTo>
-                    <a:pt x="3509503" y="2663727"/>
-                  </a:lnTo>
-                  <a:lnTo>
-                    <a:pt x="3581126" y="2670896"/>
-                  </a:lnTo>
-                  <a:lnTo>
-                    <a:pt x="3652748" y="2678002"/>
-                  </a:lnTo>
-                  <a:lnTo>
-                    <a:pt x="3724371" y="2685046"/>
-                  </a:lnTo>
-                  <a:lnTo>
-                    <a:pt x="3795993" y="2692029"/>
-                  </a:lnTo>
-                  <a:lnTo>
-                    <a:pt x="3867616" y="2698950"/>
-                  </a:lnTo>
-                  <a:lnTo>
-                    <a:pt x="3939238" y="2705811"/>
-                  </a:lnTo>
-                  <a:lnTo>
-                    <a:pt x="4010861" y="2712612"/>
-                  </a:lnTo>
-                  <a:lnTo>
-                    <a:pt x="4082483" y="2719354"/>
-                  </a:lnTo>
-                  <a:lnTo>
-                    <a:pt x="4154106" y="2726036"/>
-                  </a:lnTo>
-                  <a:lnTo>
-                    <a:pt x="4225729" y="2732660"/>
-                  </a:lnTo>
-                  <a:lnTo>
-                    <a:pt x="4297351" y="2739227"/>
-                  </a:lnTo>
-                  <a:lnTo>
-                    <a:pt x="4368974" y="2745736"/>
-                  </a:lnTo>
-                  <a:lnTo>
-                    <a:pt x="4440596" y="2752188"/>
-                  </a:lnTo>
-                  <a:lnTo>
-                    <a:pt x="4512219" y="2758583"/>
-                  </a:lnTo>
-                  <a:lnTo>
-                    <a:pt x="4583841" y="2764923"/>
-                  </a:lnTo>
-                  <a:lnTo>
-                    <a:pt x="4655464" y="2771207"/>
-                  </a:lnTo>
-                  <a:lnTo>
-                    <a:pt x="4727086" y="2777436"/>
-                  </a:lnTo>
-                  <a:lnTo>
-                    <a:pt x="4798709" y="2783611"/>
-                  </a:lnTo>
-                  <a:lnTo>
-                    <a:pt x="4870331" y="2789732"/>
-                  </a:lnTo>
-                  <a:lnTo>
-                    <a:pt x="4941954" y="2795799"/>
-                  </a:lnTo>
-                  <a:lnTo>
-                    <a:pt x="5013576" y="2801814"/>
-                  </a:lnTo>
-                  <a:lnTo>
-                    <a:pt x="5085199" y="2807775"/>
-                  </a:lnTo>
-                  <a:lnTo>
-                    <a:pt x="5156821" y="2813685"/>
-                  </a:lnTo>
-                  <a:lnTo>
-                    <a:pt x="5228444" y="2819543"/>
-                  </a:lnTo>
-                  <a:lnTo>
-                    <a:pt x="5300066" y="2825350"/>
-                  </a:lnTo>
-                  <a:lnTo>
-                    <a:pt x="5371689" y="2831106"/>
-                  </a:lnTo>
-                  <a:lnTo>
-                    <a:pt x="5443311" y="2836811"/>
-                  </a:lnTo>
-                  <a:lnTo>
-                    <a:pt x="5514934" y="2842467"/>
-                  </a:lnTo>
-                  <a:lnTo>
-                    <a:pt x="5586557" y="2848073"/>
-                  </a:lnTo>
-                  <a:lnTo>
-                    <a:pt x="5658179" y="2853631"/>
-                  </a:lnTo>
-                  <a:lnTo>
-                    <a:pt x="5729802" y="2859139"/>
-                  </a:lnTo>
-                  <a:lnTo>
-                    <a:pt x="5801424" y="2864600"/>
-                  </a:lnTo>
-                  <a:lnTo>
-                    <a:pt x="5873047" y="2870013"/>
-                  </a:lnTo>
-                  <a:lnTo>
-                    <a:pt x="5944669" y="2875378"/>
-                  </a:lnTo>
-                  <a:lnTo>
-                    <a:pt x="6016292" y="2880697"/>
-                  </a:lnTo>
-                  <a:lnTo>
-                    <a:pt x="6087914" y="2885969"/>
-                  </a:lnTo>
-                  <a:lnTo>
-                    <a:pt x="6159537" y="2891195"/>
-                  </a:lnTo>
-                  <a:lnTo>
-                    <a:pt x="6231159" y="2896375"/>
-                  </a:lnTo>
-                  <a:lnTo>
-                    <a:pt x="6302782" y="2901510"/>
-                  </a:lnTo>
-                  <a:lnTo>
-                    <a:pt x="6374404" y="2906600"/>
-                  </a:lnTo>
-                  <a:lnTo>
-                    <a:pt x="6446027" y="2911646"/>
-                  </a:lnTo>
-                  <a:lnTo>
-                    <a:pt x="6517649" y="2916647"/>
-                  </a:lnTo>
-                  <a:lnTo>
-                    <a:pt x="6589272" y="2921605"/>
-                  </a:lnTo>
-                  <a:lnTo>
-                    <a:pt x="6660894" y="2926520"/>
-                  </a:lnTo>
-                  <a:lnTo>
-                    <a:pt x="6732517" y="2931391"/>
-                  </a:lnTo>
-                  <a:lnTo>
-                    <a:pt x="6804139" y="2936220"/>
-                  </a:lnTo>
-                  <a:lnTo>
-                    <a:pt x="6875762" y="2941007"/>
-                  </a:lnTo>
-                  <a:lnTo>
-                    <a:pt x="6947385" y="2945752"/>
-                  </a:lnTo>
-                  <a:lnTo>
-                    <a:pt x="7019007" y="2950455"/>
-                  </a:lnTo>
-                  <a:lnTo>
-                    <a:pt x="7090630" y="2955117"/>
-                  </a:lnTo>
-                  <a:lnTo>
-                    <a:pt x="7090630" y="3370507"/>
-                  </a:lnTo>
-                  <a:lnTo>
-                    <a:pt x="7019007" y="3366025"/>
-                  </a:lnTo>
-                  <a:lnTo>
-                    <a:pt x="6947385" y="3361366"/>
-                  </a:lnTo>
-                  <a:lnTo>
-                    <a:pt x="6875762" y="3356523"/>
-                  </a:lnTo>
-                  <a:lnTo>
-                    <a:pt x="6804139" y="3351488"/>
-                  </a:lnTo>
-                  <a:lnTo>
-                    <a:pt x="6732517" y="3346253"/>
-                  </a:lnTo>
-                  <a:lnTo>
-                    <a:pt x="6660894" y="3340812"/>
-                  </a:lnTo>
-                  <a:lnTo>
-                    <a:pt x="6589272" y="3335155"/>
-                  </a:lnTo>
-                  <a:lnTo>
-                    <a:pt x="6517649" y="3329275"/>
-                  </a:lnTo>
-                  <a:lnTo>
-                    <a:pt x="6446027" y="3323161"/>
-                  </a:lnTo>
-                  <a:lnTo>
-                    <a:pt x="6374404" y="3316806"/>
-                  </a:lnTo>
-                  <a:lnTo>
-                    <a:pt x="6302782" y="3310199"/>
-                  </a:lnTo>
-                  <a:lnTo>
-                    <a:pt x="6231159" y="3303331"/>
-                  </a:lnTo>
-                  <a:lnTo>
-                    <a:pt x="6159537" y="3296190"/>
-                  </a:lnTo>
-                  <a:lnTo>
-                    <a:pt x="6087914" y="3288768"/>
-                  </a:lnTo>
-                  <a:lnTo>
-                    <a:pt x="6016292" y="3281051"/>
-                  </a:lnTo>
-                  <a:lnTo>
-                    <a:pt x="5944669" y="3273029"/>
-                  </a:lnTo>
-                  <a:lnTo>
-                    <a:pt x="5873047" y="3264690"/>
-                  </a:lnTo>
-                  <a:lnTo>
-                    <a:pt x="5801424" y="3256020"/>
-                  </a:lnTo>
-                  <a:lnTo>
-                    <a:pt x="5729802" y="3247008"/>
-                  </a:lnTo>
-                  <a:lnTo>
-                    <a:pt x="5658179" y="3237639"/>
-                  </a:lnTo>
-                  <a:lnTo>
-                    <a:pt x="5586557" y="3227899"/>
-                  </a:lnTo>
-                  <a:lnTo>
-                    <a:pt x="5514934" y="3217773"/>
-                  </a:lnTo>
-                  <a:lnTo>
-                    <a:pt x="5443311" y="3207247"/>
-                  </a:lnTo>
-                  <a:lnTo>
-                    <a:pt x="5371689" y="3196304"/>
-                  </a:lnTo>
-                  <a:lnTo>
-                    <a:pt x="5300066" y="3184928"/>
-                  </a:lnTo>
-                  <a:lnTo>
-                    <a:pt x="5228444" y="3173102"/>
-                  </a:lnTo>
-                  <a:lnTo>
-                    <a:pt x="5156821" y="3160808"/>
-                  </a:lnTo>
-                  <a:lnTo>
-                    <a:pt x="5085199" y="3148027"/>
-                  </a:lnTo>
-                  <a:lnTo>
-                    <a:pt x="5013576" y="3134741"/>
-                  </a:lnTo>
-                  <a:lnTo>
-                    <a:pt x="4941954" y="3120929"/>
-                  </a:lnTo>
-                  <a:lnTo>
-                    <a:pt x="4870331" y="3106570"/>
-                  </a:lnTo>
-                  <a:lnTo>
-                    <a:pt x="4798709" y="3091642"/>
-                  </a:lnTo>
-                  <a:lnTo>
-                    <a:pt x="4727086" y="3076124"/>
-                  </a:lnTo>
-                  <a:lnTo>
-                    <a:pt x="4655464" y="3059992"/>
-                  </a:lnTo>
-                  <a:lnTo>
-                    <a:pt x="4583841" y="3043222"/>
-                  </a:lnTo>
-                  <a:lnTo>
-                    <a:pt x="4512219" y="3025787"/>
-                  </a:lnTo>
-                  <a:lnTo>
-                    <a:pt x="4440596" y="3007663"/>
-                  </a:lnTo>
-                  <a:lnTo>
-                    <a:pt x="4368974" y="2988821"/>
-                  </a:lnTo>
-                  <a:lnTo>
-                    <a:pt x="4297351" y="2969234"/>
-                  </a:lnTo>
-                  <a:lnTo>
-                    <a:pt x="4225729" y="2948872"/>
-                  </a:lnTo>
-                  <a:lnTo>
-                    <a:pt x="4154106" y="2927703"/>
-                  </a:lnTo>
-                  <a:lnTo>
-                    <a:pt x="4082483" y="2905697"/>
-                  </a:lnTo>
-                  <a:lnTo>
-                    <a:pt x="4010861" y="2882820"/>
-                  </a:lnTo>
-                  <a:lnTo>
-                    <a:pt x="3939238" y="2859038"/>
-                  </a:lnTo>
-                  <a:lnTo>
-                    <a:pt x="3867616" y="2834314"/>
-                  </a:lnTo>
-                  <a:lnTo>
-                    <a:pt x="3795993" y="2808612"/>
-                  </a:lnTo>
-                  <a:lnTo>
-                    <a:pt x="3724371" y="2781893"/>
-                  </a:lnTo>
-                  <a:lnTo>
-                    <a:pt x="3652748" y="2754116"/>
-                  </a:lnTo>
-                  <a:lnTo>
-                    <a:pt x="3581126" y="2725240"/>
-                  </a:lnTo>
-                  <a:lnTo>
-                    <a:pt x="3509503" y="2695222"/>
-                  </a:lnTo>
-                  <a:lnTo>
-                    <a:pt x="3437881" y="2664015"/>
-                  </a:lnTo>
-                  <a:lnTo>
-                    <a:pt x="3366258" y="2649199"/>
-                  </a:lnTo>
-                  <a:lnTo>
-                    <a:pt x="3294636" y="2641838"/>
-                  </a:lnTo>
-                  <a:lnTo>
-                    <a:pt x="3223013" y="2634413"/>
-                  </a:lnTo>
-                  <a:lnTo>
-                    <a:pt x="3151391" y="2626923"/>
-                  </a:lnTo>
-                  <a:lnTo>
-                    <a:pt x="3079768" y="2619366"/>
-                  </a:lnTo>
-                  <a:lnTo>
-                    <a:pt x="3008146" y="2611742"/>
-                  </a:lnTo>
-                  <a:lnTo>
-                    <a:pt x="2936523" y="2604052"/>
-                  </a:lnTo>
-                  <a:lnTo>
-                    <a:pt x="2864901" y="2596293"/>
-                  </a:lnTo>
-                  <a:lnTo>
-                    <a:pt x="2793278" y="2588466"/>
-                  </a:lnTo>
-                  <a:lnTo>
-                    <a:pt x="2721655" y="2580571"/>
-                  </a:lnTo>
-                  <a:lnTo>
-                    <a:pt x="2650033" y="2572605"/>
-                  </a:lnTo>
-                  <a:lnTo>
-                    <a:pt x="2578410" y="2564569"/>
-                  </a:lnTo>
-                  <a:lnTo>
-                    <a:pt x="2506788" y="2556463"/>
-                  </a:lnTo>
-                  <a:lnTo>
-                    <a:pt x="2435165" y="2548284"/>
-                  </a:lnTo>
-                  <a:lnTo>
-                    <a:pt x="2363543" y="2540034"/>
-                  </a:lnTo>
-                  <a:lnTo>
-                    <a:pt x="2291920" y="2531711"/>
-                  </a:lnTo>
-                  <a:lnTo>
-                    <a:pt x="2220298" y="2523315"/>
-                  </a:lnTo>
-                  <a:lnTo>
-                    <a:pt x="2148675" y="2514844"/>
-                  </a:lnTo>
-                  <a:lnTo>
-                    <a:pt x="2077053" y="2506299"/>
-                  </a:lnTo>
-                  <a:lnTo>
-                    <a:pt x="2005430" y="2497678"/>
-                  </a:lnTo>
-                  <a:lnTo>
-                    <a:pt x="1933808" y="2488982"/>
-                  </a:lnTo>
-                  <a:lnTo>
-                    <a:pt x="1862185" y="2480208"/>
-                  </a:lnTo>
-                  <a:lnTo>
-                    <a:pt x="1790563" y="2471358"/>
-                  </a:lnTo>
-                  <a:lnTo>
-                    <a:pt x="1718940" y="2462429"/>
-                  </a:lnTo>
-                  <a:lnTo>
-                    <a:pt x="1647318" y="2453421"/>
-                  </a:lnTo>
-                  <a:lnTo>
-                    <a:pt x="1575695" y="2444334"/>
-                  </a:lnTo>
-                  <a:lnTo>
-                    <a:pt x="1504073" y="2435167"/>
-                  </a:lnTo>
-                  <a:lnTo>
-                    <a:pt x="1432450" y="2425919"/>
-                  </a:lnTo>
-                  <a:lnTo>
-                    <a:pt x="1360827" y="2416590"/>
-                  </a:lnTo>
-                  <a:lnTo>
-                    <a:pt x="1289205" y="2407178"/>
-                  </a:lnTo>
-                  <a:lnTo>
-                    <a:pt x="1217582" y="2397683"/>
-                  </a:lnTo>
-                  <a:lnTo>
-                    <a:pt x="1145960" y="2388105"/>
-                  </a:lnTo>
-                  <a:lnTo>
-                    <a:pt x="1074337" y="2378442"/>
-                  </a:lnTo>
-                  <a:lnTo>
-                    <a:pt x="1002715" y="2368694"/>
-                  </a:lnTo>
-                  <a:lnTo>
-                    <a:pt x="931092" y="2358859"/>
-                  </a:lnTo>
-                  <a:lnTo>
-                    <a:pt x="859470" y="2348939"/>
-                  </a:lnTo>
-                  <a:lnTo>
-                    <a:pt x="787847" y="2338930"/>
-                  </a:lnTo>
-                  <a:lnTo>
-                    <a:pt x="716225" y="2328833"/>
-                  </a:lnTo>
-                  <a:lnTo>
-                    <a:pt x="644602" y="2318648"/>
-                  </a:lnTo>
-                  <a:lnTo>
-                    <a:pt x="572980" y="2308372"/>
-                  </a:lnTo>
-                  <a:lnTo>
-                    <a:pt x="501357" y="2298006"/>
-                  </a:lnTo>
-                  <a:lnTo>
-                    <a:pt x="429735" y="2287548"/>
-                  </a:lnTo>
-                  <a:lnTo>
-                    <a:pt x="358112" y="2276998"/>
-                  </a:lnTo>
-                  <a:lnTo>
-                    <a:pt x="286490" y="2266356"/>
-                  </a:lnTo>
-                  <a:lnTo>
-                    <a:pt x="214867" y="2255619"/>
-                  </a:lnTo>
-                  <a:lnTo>
-                    <a:pt x="143245" y="2244787"/>
-                  </a:lnTo>
-                  <a:lnTo>
-                    <a:pt x="71622" y="2233860"/>
-                  </a:lnTo>
-                  <a:lnTo>
-                    <a:pt x="0" y="2222837"/>
+                    <a:pt x="787847" y="22157"/>
+                  </a:lnTo>
+                  <a:lnTo>
+                    <a:pt x="859470" y="154340"/>
+                  </a:lnTo>
+                  <a:lnTo>
+                    <a:pt x="931092" y="281474"/>
+                  </a:lnTo>
+                  <a:lnTo>
+                    <a:pt x="1002715" y="403754"/>
+                  </a:lnTo>
+                  <a:lnTo>
+                    <a:pt x="1074337" y="521365"/>
+                  </a:lnTo>
+                  <a:lnTo>
+                    <a:pt x="1145960" y="634485"/>
+                  </a:lnTo>
+                  <a:lnTo>
+                    <a:pt x="1217582" y="743285"/>
+                  </a:lnTo>
+                  <a:lnTo>
+                    <a:pt x="1289205" y="847931"/>
+                  </a:lnTo>
+                  <a:lnTo>
+                    <a:pt x="1360827" y="948581"/>
+                  </a:lnTo>
+                  <a:lnTo>
+                    <a:pt x="1432450" y="1045387"/>
+                  </a:lnTo>
+                  <a:lnTo>
+                    <a:pt x="1504073" y="1138497"/>
+                  </a:lnTo>
+                  <a:lnTo>
+                    <a:pt x="1575695" y="1228051"/>
+                  </a:lnTo>
+                  <a:lnTo>
+                    <a:pt x="1647318" y="1314186"/>
+                  </a:lnTo>
+                  <a:lnTo>
+                    <a:pt x="1718940" y="1397031"/>
+                  </a:lnTo>
+                  <a:lnTo>
+                    <a:pt x="1790563" y="1476713"/>
+                  </a:lnTo>
+                  <a:lnTo>
+                    <a:pt x="1862185" y="1553353"/>
+                  </a:lnTo>
+                  <a:lnTo>
+                    <a:pt x="1933808" y="1627066"/>
+                  </a:lnTo>
+                  <a:lnTo>
+                    <a:pt x="2005430" y="1697964"/>
+                  </a:lnTo>
+                  <a:lnTo>
+                    <a:pt x="2077053" y="1766155"/>
+                  </a:lnTo>
+                  <a:lnTo>
+                    <a:pt x="2148675" y="1831742"/>
+                  </a:lnTo>
+                  <a:lnTo>
+                    <a:pt x="2220298" y="1894824"/>
+                  </a:lnTo>
+                  <a:lnTo>
+                    <a:pt x="2291920" y="1955498"/>
+                  </a:lnTo>
+                  <a:lnTo>
+                    <a:pt x="2363543" y="2013855"/>
+                  </a:lnTo>
+                  <a:lnTo>
+                    <a:pt x="2435165" y="2069983"/>
+                  </a:lnTo>
+                  <a:lnTo>
+                    <a:pt x="2506788" y="2123968"/>
+                  </a:lnTo>
+                  <a:lnTo>
+                    <a:pt x="2578410" y="2175892"/>
+                  </a:lnTo>
+                  <a:lnTo>
+                    <a:pt x="2650033" y="2225833"/>
+                  </a:lnTo>
+                  <a:lnTo>
+                    <a:pt x="2721655" y="2273867"/>
+                  </a:lnTo>
+                  <a:lnTo>
+                    <a:pt x="2793278" y="2320067"/>
+                  </a:lnTo>
+                  <a:lnTo>
+                    <a:pt x="2864901" y="2364502"/>
+                  </a:lnTo>
+                  <a:lnTo>
+                    <a:pt x="2936523" y="2407241"/>
+                  </a:lnTo>
+                  <a:lnTo>
+                    <a:pt x="3008146" y="2448348"/>
+                  </a:lnTo>
+                  <a:lnTo>
+                    <a:pt x="3079768" y="2487885"/>
+                  </a:lnTo>
+                  <a:lnTo>
+                    <a:pt x="3151391" y="2525912"/>
+                  </a:lnTo>
+                  <a:lnTo>
+                    <a:pt x="3223013" y="2562488"/>
+                  </a:lnTo>
+                  <a:lnTo>
+                    <a:pt x="3294636" y="2597666"/>
+                  </a:lnTo>
+                  <a:lnTo>
+                    <a:pt x="3366258" y="2631502"/>
+                  </a:lnTo>
+                  <a:lnTo>
+                    <a:pt x="3437881" y="2656518"/>
+                  </a:lnTo>
+                  <a:lnTo>
+                    <a:pt x="3509503" y="2663827"/>
+                  </a:lnTo>
+                  <a:lnTo>
+                    <a:pt x="3581126" y="2671071"/>
+                  </a:lnTo>
+                  <a:lnTo>
+                    <a:pt x="3652748" y="2678252"/>
+                  </a:lnTo>
+                  <a:lnTo>
+                    <a:pt x="3724371" y="2685368"/>
+                  </a:lnTo>
+                  <a:lnTo>
+                    <a:pt x="3795993" y="2692422"/>
+                  </a:lnTo>
+                  <a:lnTo>
+                    <a:pt x="3867616" y="2699414"/>
+                  </a:lnTo>
+                  <a:lnTo>
+                    <a:pt x="3939238" y="2706344"/>
+                  </a:lnTo>
+                  <a:lnTo>
+                    <a:pt x="4010861" y="2713212"/>
+                  </a:lnTo>
+                  <a:lnTo>
+                    <a:pt x="4082483" y="2720020"/>
+                  </a:lnTo>
+                  <a:lnTo>
+                    <a:pt x="4154106" y="2726768"/>
+                  </a:lnTo>
+                  <a:lnTo>
+                    <a:pt x="4225729" y="2733456"/>
+                  </a:lnTo>
+                  <a:lnTo>
+                    <a:pt x="4297351" y="2740085"/>
+                  </a:lnTo>
+                  <a:lnTo>
+                    <a:pt x="4368974" y="2746656"/>
+                  </a:lnTo>
+                  <a:lnTo>
+                    <a:pt x="4440596" y="2753168"/>
+                  </a:lnTo>
+                  <a:lnTo>
+                    <a:pt x="4512219" y="2759623"/>
+                  </a:lnTo>
+                  <a:lnTo>
+                    <a:pt x="4583841" y="2766021"/>
+                  </a:lnTo>
+                  <a:lnTo>
+                    <a:pt x="4655464" y="2772362"/>
+                  </a:lnTo>
+                  <a:lnTo>
+                    <a:pt x="4727086" y="2778647"/>
+                  </a:lnTo>
+                  <a:lnTo>
+                    <a:pt x="4798709" y="2784877"/>
+                  </a:lnTo>
+                  <a:lnTo>
+                    <a:pt x="4870331" y="2791052"/>
+                  </a:lnTo>
+                  <a:lnTo>
+                    <a:pt x="4941954" y="2797172"/>
+                  </a:lnTo>
+                  <a:lnTo>
+                    <a:pt x="5013576" y="2803238"/>
+                  </a:lnTo>
+                  <a:lnTo>
+                    <a:pt x="5085199" y="2809251"/>
+                  </a:lnTo>
+                  <a:lnTo>
+                    <a:pt x="5156821" y="2815210"/>
+                  </a:lnTo>
+                  <a:lnTo>
+                    <a:pt x="5228444" y="2821117"/>
+                  </a:lnTo>
+                  <a:lnTo>
+                    <a:pt x="5300066" y="2826971"/>
+                  </a:lnTo>
+                  <a:lnTo>
+                    <a:pt x="5371689" y="2832774"/>
+                  </a:lnTo>
+                  <a:lnTo>
+                    <a:pt x="5443311" y="2838526"/>
+                  </a:lnTo>
+                  <a:lnTo>
+                    <a:pt x="5514934" y="2844226"/>
+                  </a:lnTo>
+                  <a:lnTo>
+                    <a:pt x="5586557" y="2849877"/>
+                  </a:lnTo>
+                  <a:lnTo>
+                    <a:pt x="5658179" y="2855477"/>
+                  </a:lnTo>
+                  <a:lnTo>
+                    <a:pt x="5729802" y="2861028"/>
+                  </a:lnTo>
+                  <a:lnTo>
+                    <a:pt x="5801424" y="2866530"/>
+                  </a:lnTo>
+                  <a:lnTo>
+                    <a:pt x="5873047" y="2871983"/>
+                  </a:lnTo>
+                  <a:lnTo>
+                    <a:pt x="5944669" y="2877388"/>
+                  </a:lnTo>
+                  <a:lnTo>
+                    <a:pt x="6016292" y="2882746"/>
+                  </a:lnTo>
+                  <a:lnTo>
+                    <a:pt x="6087914" y="2888056"/>
+                  </a:lnTo>
+                  <a:lnTo>
+                    <a:pt x="6159537" y="2893319"/>
+                  </a:lnTo>
+                  <a:lnTo>
+                    <a:pt x="6231159" y="2898535"/>
+                  </a:lnTo>
+                  <a:lnTo>
+                    <a:pt x="6302782" y="2903706"/>
+                  </a:lnTo>
+                  <a:lnTo>
+                    <a:pt x="6374404" y="2908831"/>
+                  </a:lnTo>
+                  <a:lnTo>
+                    <a:pt x="6446027" y="2913910"/>
+                  </a:lnTo>
+                  <a:lnTo>
+                    <a:pt x="6517649" y="2918945"/>
+                  </a:lnTo>
+                  <a:lnTo>
+                    <a:pt x="6589272" y="2923935"/>
+                  </a:lnTo>
+                  <a:lnTo>
+                    <a:pt x="6660894" y="2928881"/>
+                  </a:lnTo>
+                  <a:lnTo>
+                    <a:pt x="6732517" y="2933784"/>
+                  </a:lnTo>
+                  <a:lnTo>
+                    <a:pt x="6804139" y="2938643"/>
+                  </a:lnTo>
+                  <a:lnTo>
+                    <a:pt x="6875762" y="2943459"/>
+                  </a:lnTo>
+                  <a:lnTo>
+                    <a:pt x="6947385" y="2948233"/>
+                  </a:lnTo>
+                  <a:lnTo>
+                    <a:pt x="7019007" y="2952964"/>
+                  </a:lnTo>
+                  <a:lnTo>
+                    <a:pt x="7090630" y="2957654"/>
+                  </a:lnTo>
+                  <a:lnTo>
+                    <a:pt x="7090630" y="3371204"/>
+                  </a:lnTo>
+                  <a:lnTo>
+                    <a:pt x="7019007" y="3366736"/>
+                  </a:lnTo>
+                  <a:lnTo>
+                    <a:pt x="6947385" y="3362091"/>
+                  </a:lnTo>
+                  <a:lnTo>
+                    <a:pt x="6875762" y="3357261"/>
+                  </a:lnTo>
+                  <a:lnTo>
+                    <a:pt x="6804139" y="3352239"/>
+                  </a:lnTo>
+                  <a:lnTo>
+                    <a:pt x="6732517" y="3347018"/>
+                  </a:lnTo>
+                  <a:lnTo>
+                    <a:pt x="6660894" y="3341590"/>
+                  </a:lnTo>
+                  <a:lnTo>
+                    <a:pt x="6589272" y="3335946"/>
+                  </a:lnTo>
+                  <a:lnTo>
+                    <a:pt x="6517649" y="3330078"/>
+                  </a:lnTo>
+                  <a:lnTo>
+                    <a:pt x="6446027" y="3323977"/>
+                  </a:lnTo>
+                  <a:lnTo>
+                    <a:pt x="6374404" y="3317634"/>
+                  </a:lnTo>
+                  <a:lnTo>
+                    <a:pt x="6302782" y="3311039"/>
+                  </a:lnTo>
+                  <a:lnTo>
+                    <a:pt x="6231159" y="3304183"/>
+                  </a:lnTo>
+                  <a:lnTo>
+                    <a:pt x="6159537" y="3297054"/>
+                  </a:lnTo>
+                  <a:lnTo>
+                    <a:pt x="6087914" y="3289642"/>
+                  </a:lnTo>
+                  <a:lnTo>
+                    <a:pt x="6016292" y="3281936"/>
+                  </a:lnTo>
+                  <a:lnTo>
+                    <a:pt x="5944669" y="3273923"/>
+                  </a:lnTo>
+                  <a:lnTo>
+                    <a:pt x="5873047" y="3265593"/>
+                  </a:lnTo>
+                  <a:lnTo>
+                    <a:pt x="5801424" y="3256932"/>
+                  </a:lnTo>
+                  <a:lnTo>
+                    <a:pt x="5729802" y="3247927"/>
+                  </a:lnTo>
+                  <a:lnTo>
+                    <a:pt x="5658179" y="3238565"/>
+                  </a:lnTo>
+                  <a:lnTo>
+                    <a:pt x="5586557" y="3228831"/>
+                  </a:lnTo>
+                  <a:lnTo>
+                    <a:pt x="5514934" y="3218710"/>
+                  </a:lnTo>
+                  <a:lnTo>
+                    <a:pt x="5443311" y="3208188"/>
+                  </a:lnTo>
+                  <a:lnTo>
+                    <a:pt x="5371689" y="3197248"/>
+                  </a:lnTo>
+                  <a:lnTo>
+                    <a:pt x="5300066" y="3185873"/>
+                  </a:lnTo>
+                  <a:lnTo>
+                    <a:pt x="5228444" y="3174048"/>
+                  </a:lnTo>
+                  <a:lnTo>
+                    <a:pt x="5156821" y="3161752"/>
+                  </a:lnTo>
+                  <a:lnTo>
+                    <a:pt x="5085199" y="3148968"/>
+                  </a:lnTo>
+                  <a:lnTo>
+                    <a:pt x="5013576" y="3135677"/>
+                  </a:lnTo>
+                  <a:lnTo>
+                    <a:pt x="4941954" y="3121858"/>
+                  </a:lnTo>
+                  <a:lnTo>
+                    <a:pt x="4870331" y="3107491"/>
+                  </a:lnTo>
+                  <a:lnTo>
+                    <a:pt x="4798709" y="3092553"/>
+                  </a:lnTo>
+                  <a:lnTo>
+                    <a:pt x="4727086" y="3077022"/>
+                  </a:lnTo>
+                  <a:lnTo>
+                    <a:pt x="4655464" y="3060875"/>
+                  </a:lnTo>
+                  <a:lnTo>
+                    <a:pt x="4583841" y="3044086"/>
+                  </a:lnTo>
+                  <a:lnTo>
+                    <a:pt x="4512219" y="3026631"/>
+                  </a:lnTo>
+                  <a:lnTo>
+                    <a:pt x="4440596" y="3008483"/>
+                  </a:lnTo>
+                  <a:lnTo>
+                    <a:pt x="4368974" y="2989614"/>
+                  </a:lnTo>
+                  <a:lnTo>
+                    <a:pt x="4297351" y="2969996"/>
+                  </a:lnTo>
+                  <a:lnTo>
+                    <a:pt x="4225729" y="2949600"/>
+                  </a:lnTo>
+                  <a:lnTo>
+                    <a:pt x="4154106" y="2928393"/>
+                  </a:lnTo>
+                  <a:lnTo>
+                    <a:pt x="4082483" y="2906345"/>
+                  </a:lnTo>
+                  <a:lnTo>
+                    <a:pt x="4010861" y="2883421"/>
+                  </a:lnTo>
+                  <a:lnTo>
+                    <a:pt x="3939238" y="2859587"/>
+                  </a:lnTo>
+                  <a:lnTo>
+                    <a:pt x="3867616" y="2834807"/>
+                  </a:lnTo>
+                  <a:lnTo>
+                    <a:pt x="3795993" y="2809044"/>
+                  </a:lnTo>
+                  <a:lnTo>
+                    <a:pt x="3724371" y="2782257"/>
+                  </a:lnTo>
+                  <a:lnTo>
+                    <a:pt x="3652748" y="2754407"/>
+                  </a:lnTo>
+                  <a:lnTo>
+                    <a:pt x="3581126" y="2725451"/>
+                  </a:lnTo>
+                  <a:lnTo>
+                    <a:pt x="3509503" y="2695346"/>
+                  </a:lnTo>
+                  <a:lnTo>
+                    <a:pt x="3437881" y="2664045"/>
+                  </a:lnTo>
+                  <a:lnTo>
+                    <a:pt x="3366258" y="2649144"/>
+                  </a:lnTo>
+                  <a:lnTo>
+                    <a:pt x="3294636" y="2641705"/>
+                  </a:lnTo>
+                  <a:lnTo>
+                    <a:pt x="3223013" y="2634199"/>
+                  </a:lnTo>
+                  <a:lnTo>
+                    <a:pt x="3151391" y="2626626"/>
+                  </a:lnTo>
+                  <a:lnTo>
+                    <a:pt x="3079768" y="2618985"/>
+                  </a:lnTo>
+                  <a:lnTo>
+                    <a:pt x="3008146" y="2611277"/>
+                  </a:lnTo>
+                  <a:lnTo>
+                    <a:pt x="2936523" y="2603499"/>
+                  </a:lnTo>
+                  <a:lnTo>
+                    <a:pt x="2864901" y="2595653"/>
+                  </a:lnTo>
+                  <a:lnTo>
+                    <a:pt x="2793278" y="2587736"/>
+                  </a:lnTo>
+                  <a:lnTo>
+                    <a:pt x="2721655" y="2579749"/>
+                  </a:lnTo>
+                  <a:lnTo>
+                    <a:pt x="2650033" y="2571691"/>
+                  </a:lnTo>
+                  <a:lnTo>
+                    <a:pt x="2578410" y="2563561"/>
+                  </a:lnTo>
+                  <a:lnTo>
+                    <a:pt x="2506788" y="2555358"/>
+                  </a:lnTo>
+                  <a:lnTo>
+                    <a:pt x="2435165" y="2547082"/>
+                  </a:lnTo>
+                  <a:lnTo>
+                    <a:pt x="2363543" y="2538733"/>
+                  </a:lnTo>
+                  <a:lnTo>
+                    <a:pt x="2291920" y="2530309"/>
+                  </a:lnTo>
+                  <a:lnTo>
+                    <a:pt x="2220298" y="2521810"/>
+                  </a:lnTo>
+                  <a:lnTo>
+                    <a:pt x="2148675" y="2513235"/>
+                  </a:lnTo>
+                  <a:lnTo>
+                    <a:pt x="2077053" y="2504584"/>
+                  </a:lnTo>
+                  <a:lnTo>
+                    <a:pt x="2005430" y="2495856"/>
+                  </a:lnTo>
+                  <a:lnTo>
+                    <a:pt x="1933808" y="2487050"/>
+                  </a:lnTo>
+                  <a:lnTo>
+                    <a:pt x="1862185" y="2478165"/>
+                  </a:lnTo>
+                  <a:lnTo>
+                    <a:pt x="1790563" y="2469201"/>
+                  </a:lnTo>
+                  <a:lnTo>
+                    <a:pt x="1718940" y="2460158"/>
+                  </a:lnTo>
+                  <a:lnTo>
+                    <a:pt x="1647318" y="2451033"/>
+                  </a:lnTo>
+                  <a:lnTo>
+                    <a:pt x="1575695" y="2441827"/>
+                  </a:lnTo>
+                  <a:lnTo>
+                    <a:pt x="1504073" y="2432540"/>
+                  </a:lnTo>
+                  <a:lnTo>
+                    <a:pt x="1432450" y="2423169"/>
+                  </a:lnTo>
+                  <a:lnTo>
+                    <a:pt x="1360827" y="2413715"/>
+                  </a:lnTo>
+                  <a:lnTo>
+                    <a:pt x="1289205" y="2404177"/>
+                  </a:lnTo>
+                  <a:lnTo>
+                    <a:pt x="1217582" y="2394553"/>
+                  </a:lnTo>
+                  <a:lnTo>
+                    <a:pt x="1145960" y="2384844"/>
+                  </a:lnTo>
+                  <a:lnTo>
+                    <a:pt x="1074337" y="2375049"/>
+                  </a:lnTo>
+                  <a:lnTo>
+                    <a:pt x="1002715" y="2365166"/>
+                  </a:lnTo>
+                  <a:lnTo>
+                    <a:pt x="931092" y="2355195"/>
+                  </a:lnTo>
+                  <a:lnTo>
+                    <a:pt x="859470" y="2345135"/>
+                  </a:lnTo>
+                  <a:lnTo>
+                    <a:pt x="787847" y="2334985"/>
+                  </a:lnTo>
+                  <a:lnTo>
+                    <a:pt x="716225" y="2324745"/>
+                  </a:lnTo>
+                  <a:lnTo>
+                    <a:pt x="644602" y="2314413"/>
+                  </a:lnTo>
+                  <a:lnTo>
+                    <a:pt x="572980" y="2303990"/>
+                  </a:lnTo>
+                  <a:lnTo>
+                    <a:pt x="501357" y="2293473"/>
+                  </a:lnTo>
+                  <a:lnTo>
+                    <a:pt x="429735" y="2282863"/>
+                  </a:lnTo>
+                  <a:lnTo>
+                    <a:pt x="358112" y="2272159"/>
+                  </a:lnTo>
+                  <a:lnTo>
+                    <a:pt x="286490" y="2261358"/>
+                  </a:lnTo>
+                  <a:lnTo>
+                    <a:pt x="214867" y="2250462"/>
+                  </a:lnTo>
+                  <a:lnTo>
+                    <a:pt x="143245" y="2239468"/>
+                  </a:lnTo>
+                  <a:lnTo>
+                    <a:pt x="71622" y="2228377"/>
+                  </a:lnTo>
+                  <a:lnTo>
+                    <a:pt x="0" y="2217186"/>
                   </a:lnTo>
                   <a:close/>
                 </a:path>
@@ -4033,282 +4033,282 @@
           </p:nvSpPr>
           <p:spPr>
             <a:xfrm>
-              <a:off x="1940244" y="2073503"/>
-              <a:ext cx="6322435" cy="2955117"/>
+              <a:off x="1948349" y="2073503"/>
+              <a:ext cx="6314330" cy="2957654"/>
             </a:xfrm>
             <a:custGeom>
               <a:avLst/>
               <a:pathLst>
-                <a:path w="6322435" h="2955117">
+                <a:path w="6314330" h="2957654">
                   <a:moveTo>
                     <a:pt x="0" y="0"/>
                   </a:moveTo>
                   <a:lnTo>
-                    <a:pt x="19652" y="37425"/>
-                  </a:lnTo>
-                  <a:lnTo>
-                    <a:pt x="91275" y="168625"/>
-                  </a:lnTo>
-                  <a:lnTo>
-                    <a:pt x="162897" y="294830"/>
-                  </a:lnTo>
-                  <a:lnTo>
-                    <a:pt x="234520" y="416230"/>
-                  </a:lnTo>
-                  <a:lnTo>
-                    <a:pt x="306142" y="533009"/>
-                  </a:lnTo>
-                  <a:lnTo>
-                    <a:pt x="377765" y="645343"/>
-                  </a:lnTo>
-                  <a:lnTo>
-                    <a:pt x="449387" y="753399"/>
-                  </a:lnTo>
-                  <a:lnTo>
-                    <a:pt x="521010" y="857342"/>
-                  </a:lnTo>
-                  <a:lnTo>
-                    <a:pt x="592632" y="957329"/>
-                  </a:lnTo>
-                  <a:lnTo>
-                    <a:pt x="664255" y="1053508"/>
-                  </a:lnTo>
-                  <a:lnTo>
-                    <a:pt x="735877" y="1146026"/>
-                  </a:lnTo>
-                  <a:lnTo>
-                    <a:pt x="807500" y="1235022"/>
-                  </a:lnTo>
-                  <a:lnTo>
-                    <a:pt x="879123" y="1320630"/>
-                  </a:lnTo>
-                  <a:lnTo>
-                    <a:pt x="950745" y="1402979"/>
-                  </a:lnTo>
-                  <a:lnTo>
-                    <a:pt x="1022368" y="1482193"/>
-                  </a:lnTo>
-                  <a:lnTo>
-                    <a:pt x="1093990" y="1558391"/>
-                  </a:lnTo>
-                  <a:lnTo>
-                    <a:pt x="1165613" y="1631689"/>
-                  </a:lnTo>
-                  <a:lnTo>
-                    <a:pt x="1237235" y="1702196"/>
-                  </a:lnTo>
-                  <a:lnTo>
-                    <a:pt x="1308858" y="1770018"/>
-                  </a:lnTo>
-                  <a:lnTo>
-                    <a:pt x="1380480" y="1835259"/>
-                  </a:lnTo>
-                  <a:lnTo>
-                    <a:pt x="1452103" y="1898016"/>
-                  </a:lnTo>
-                  <a:lnTo>
-                    <a:pt x="1523725" y="1958384"/>
-                  </a:lnTo>
-                  <a:lnTo>
-                    <a:pt x="1595348" y="2016454"/>
-                  </a:lnTo>
-                  <a:lnTo>
-                    <a:pt x="1666970" y="2072313"/>
-                  </a:lnTo>
-                  <a:lnTo>
-                    <a:pt x="1738593" y="2126046"/>
-                  </a:lnTo>
-                  <a:lnTo>
-                    <a:pt x="1810215" y="2177733"/>
-                  </a:lnTo>
-                  <a:lnTo>
-                    <a:pt x="1881838" y="2227452"/>
-                  </a:lnTo>
-                  <a:lnTo>
-                    <a:pt x="1953460" y="2275279"/>
-                  </a:lnTo>
-                  <a:lnTo>
-                    <a:pt x="2025083" y="2321285"/>
-                  </a:lnTo>
-                  <a:lnTo>
-                    <a:pt x="2096705" y="2365539"/>
-                  </a:lnTo>
-                  <a:lnTo>
-                    <a:pt x="2168328" y="2408109"/>
-                  </a:lnTo>
-                  <a:lnTo>
-                    <a:pt x="2239951" y="2449058"/>
-                  </a:lnTo>
-                  <a:lnTo>
-                    <a:pt x="2311573" y="2488448"/>
-                  </a:lnTo>
-                  <a:lnTo>
-                    <a:pt x="2383196" y="2526339"/>
-                  </a:lnTo>
-                  <a:lnTo>
-                    <a:pt x="2454818" y="2562787"/>
-                  </a:lnTo>
-                  <a:lnTo>
-                    <a:pt x="2526441" y="2597847"/>
-                  </a:lnTo>
-                  <a:lnTo>
-                    <a:pt x="2598063" y="2631573"/>
-                  </a:lnTo>
-                  <a:lnTo>
-                    <a:pt x="2669686" y="2656495"/>
-                  </a:lnTo>
-                  <a:lnTo>
-                    <a:pt x="2741308" y="2663727"/>
-                  </a:lnTo>
-                  <a:lnTo>
-                    <a:pt x="2812931" y="2670896"/>
-                  </a:lnTo>
-                  <a:lnTo>
-                    <a:pt x="2884553" y="2678002"/>
-                  </a:lnTo>
-                  <a:lnTo>
-                    <a:pt x="2956176" y="2685046"/>
-                  </a:lnTo>
-                  <a:lnTo>
-                    <a:pt x="3027798" y="2692029"/>
-                  </a:lnTo>
-                  <a:lnTo>
-                    <a:pt x="3099421" y="2698950"/>
-                  </a:lnTo>
-                  <a:lnTo>
-                    <a:pt x="3171043" y="2705811"/>
-                  </a:lnTo>
-                  <a:lnTo>
-                    <a:pt x="3242666" y="2712612"/>
-                  </a:lnTo>
-                  <a:lnTo>
-                    <a:pt x="3314288" y="2719354"/>
-                  </a:lnTo>
-                  <a:lnTo>
-                    <a:pt x="3385911" y="2726036"/>
-                  </a:lnTo>
-                  <a:lnTo>
-                    <a:pt x="3457533" y="2732660"/>
-                  </a:lnTo>
-                  <a:lnTo>
-                    <a:pt x="3529156" y="2739227"/>
-                  </a:lnTo>
-                  <a:lnTo>
-                    <a:pt x="3600779" y="2745736"/>
-                  </a:lnTo>
-                  <a:lnTo>
-                    <a:pt x="3672401" y="2752188"/>
-                  </a:lnTo>
-                  <a:lnTo>
-                    <a:pt x="3744024" y="2758583"/>
-                  </a:lnTo>
-                  <a:lnTo>
-                    <a:pt x="3815646" y="2764923"/>
-                  </a:lnTo>
-                  <a:lnTo>
-                    <a:pt x="3887269" y="2771207"/>
-                  </a:lnTo>
-                  <a:lnTo>
-                    <a:pt x="3958891" y="2777436"/>
-                  </a:lnTo>
-                  <a:lnTo>
-                    <a:pt x="4030514" y="2783611"/>
-                  </a:lnTo>
-                  <a:lnTo>
-                    <a:pt x="4102136" y="2789732"/>
-                  </a:lnTo>
-                  <a:lnTo>
-                    <a:pt x="4173759" y="2795799"/>
-                  </a:lnTo>
-                  <a:lnTo>
-                    <a:pt x="4245381" y="2801814"/>
-                  </a:lnTo>
-                  <a:lnTo>
-                    <a:pt x="4317004" y="2807775"/>
-                  </a:lnTo>
-                  <a:lnTo>
-                    <a:pt x="4388626" y="2813685"/>
-                  </a:lnTo>
-                  <a:lnTo>
-                    <a:pt x="4460249" y="2819543"/>
-                  </a:lnTo>
-                  <a:lnTo>
-                    <a:pt x="4531871" y="2825350"/>
-                  </a:lnTo>
-                  <a:lnTo>
-                    <a:pt x="4603494" y="2831106"/>
-                  </a:lnTo>
-                  <a:lnTo>
-                    <a:pt x="4675116" y="2836811"/>
-                  </a:lnTo>
-                  <a:lnTo>
-                    <a:pt x="4746739" y="2842467"/>
-                  </a:lnTo>
-                  <a:lnTo>
-                    <a:pt x="4818361" y="2848073"/>
-                  </a:lnTo>
-                  <a:lnTo>
-                    <a:pt x="4889984" y="2853631"/>
-                  </a:lnTo>
-                  <a:lnTo>
-                    <a:pt x="4961607" y="2859139"/>
-                  </a:lnTo>
-                  <a:lnTo>
-                    <a:pt x="5033229" y="2864600"/>
-                  </a:lnTo>
-                  <a:lnTo>
-                    <a:pt x="5104852" y="2870013"/>
-                  </a:lnTo>
-                  <a:lnTo>
-                    <a:pt x="5176474" y="2875378"/>
-                  </a:lnTo>
-                  <a:lnTo>
-                    <a:pt x="5248097" y="2880697"/>
-                  </a:lnTo>
-                  <a:lnTo>
-                    <a:pt x="5319719" y="2885969"/>
-                  </a:lnTo>
-                  <a:lnTo>
-                    <a:pt x="5391342" y="2891195"/>
-                  </a:lnTo>
-                  <a:lnTo>
-                    <a:pt x="5462964" y="2896375"/>
-                  </a:lnTo>
-                  <a:lnTo>
-                    <a:pt x="5534587" y="2901510"/>
-                  </a:lnTo>
-                  <a:lnTo>
-                    <a:pt x="5606209" y="2906600"/>
-                  </a:lnTo>
-                  <a:lnTo>
-                    <a:pt x="5677832" y="2911646"/>
-                  </a:lnTo>
-                  <a:lnTo>
-                    <a:pt x="5749454" y="2916647"/>
-                  </a:lnTo>
-                  <a:lnTo>
-                    <a:pt x="5821077" y="2921605"/>
-                  </a:lnTo>
-                  <a:lnTo>
-                    <a:pt x="5892699" y="2926520"/>
-                  </a:lnTo>
-                  <a:lnTo>
-                    <a:pt x="5964322" y="2931391"/>
-                  </a:lnTo>
-                  <a:lnTo>
-                    <a:pt x="6035944" y="2936220"/>
-                  </a:lnTo>
-                  <a:lnTo>
-                    <a:pt x="6107567" y="2941007"/>
-                  </a:lnTo>
-                  <a:lnTo>
-                    <a:pt x="6179189" y="2945752"/>
-                  </a:lnTo>
-                  <a:lnTo>
-                    <a:pt x="6250812" y="2950455"/>
-                  </a:lnTo>
-                  <a:lnTo>
-                    <a:pt x="6322435" y="2955117"/>
+                    <a:pt x="11547" y="22157"/>
+                  </a:lnTo>
+                  <a:lnTo>
+                    <a:pt x="83170" y="154340"/>
+                  </a:lnTo>
+                  <a:lnTo>
+                    <a:pt x="154792" y="281474"/>
+                  </a:lnTo>
+                  <a:lnTo>
+                    <a:pt x="226415" y="403754"/>
+                  </a:lnTo>
+                  <a:lnTo>
+                    <a:pt x="298037" y="521365"/>
+                  </a:lnTo>
+                  <a:lnTo>
+                    <a:pt x="369660" y="634485"/>
+                  </a:lnTo>
+                  <a:lnTo>
+                    <a:pt x="441282" y="743285"/>
+                  </a:lnTo>
+                  <a:lnTo>
+                    <a:pt x="512905" y="847931"/>
+                  </a:lnTo>
+                  <a:lnTo>
+                    <a:pt x="584527" y="948581"/>
+                  </a:lnTo>
+                  <a:lnTo>
+                    <a:pt x="656150" y="1045387"/>
+                  </a:lnTo>
+                  <a:lnTo>
+                    <a:pt x="727772" y="1138497"/>
+                  </a:lnTo>
+                  <a:lnTo>
+                    <a:pt x="799395" y="1228051"/>
+                  </a:lnTo>
+                  <a:lnTo>
+                    <a:pt x="871018" y="1314186"/>
+                  </a:lnTo>
+                  <a:lnTo>
+                    <a:pt x="942640" y="1397031"/>
+                  </a:lnTo>
+                  <a:lnTo>
+                    <a:pt x="1014263" y="1476713"/>
+                  </a:lnTo>
+                  <a:lnTo>
+                    <a:pt x="1085885" y="1553353"/>
+                  </a:lnTo>
+                  <a:lnTo>
+                    <a:pt x="1157508" y="1627066"/>
+                  </a:lnTo>
+                  <a:lnTo>
+                    <a:pt x="1229130" y="1697964"/>
+                  </a:lnTo>
+                  <a:lnTo>
+                    <a:pt x="1300753" y="1766155"/>
+                  </a:lnTo>
+                  <a:lnTo>
+                    <a:pt x="1372375" y="1831742"/>
+                  </a:lnTo>
+                  <a:lnTo>
+                    <a:pt x="1443998" y="1894824"/>
+                  </a:lnTo>
+                  <a:lnTo>
+                    <a:pt x="1515620" y="1955498"/>
+                  </a:lnTo>
+                  <a:lnTo>
+                    <a:pt x="1587243" y="2013855"/>
+                  </a:lnTo>
+                  <a:lnTo>
+                    <a:pt x="1658865" y="2069983"/>
+                  </a:lnTo>
+                  <a:lnTo>
+                    <a:pt x="1730488" y="2123968"/>
+                  </a:lnTo>
+                  <a:lnTo>
+                    <a:pt x="1802110" y="2175892"/>
+                  </a:lnTo>
+                  <a:lnTo>
+                    <a:pt x="1873733" y="2225833"/>
+                  </a:lnTo>
+                  <a:lnTo>
+                    <a:pt x="1945355" y="2273867"/>
+                  </a:lnTo>
+                  <a:lnTo>
+                    <a:pt x="2016978" y="2320067"/>
+                  </a:lnTo>
+                  <a:lnTo>
+                    <a:pt x="2088600" y="2364502"/>
+                  </a:lnTo>
+                  <a:lnTo>
+                    <a:pt x="2160223" y="2407241"/>
+                  </a:lnTo>
+                  <a:lnTo>
+                    <a:pt x="2231846" y="2448348"/>
+                  </a:lnTo>
+                  <a:lnTo>
+                    <a:pt x="2303468" y="2487885"/>
+                  </a:lnTo>
+                  <a:lnTo>
+                    <a:pt x="2375091" y="2525912"/>
+                  </a:lnTo>
+                  <a:lnTo>
+                    <a:pt x="2446713" y="2562488"/>
+                  </a:lnTo>
+                  <a:lnTo>
+                    <a:pt x="2518336" y="2597666"/>
+                  </a:lnTo>
+                  <a:lnTo>
+                    <a:pt x="2589958" y="2631502"/>
+                  </a:lnTo>
+                  <a:lnTo>
+                    <a:pt x="2661581" y="2656518"/>
+                  </a:lnTo>
+                  <a:lnTo>
+                    <a:pt x="2733203" y="2663827"/>
+                  </a:lnTo>
+                  <a:lnTo>
+                    <a:pt x="2804826" y="2671071"/>
+                  </a:lnTo>
+                  <a:lnTo>
+                    <a:pt x="2876448" y="2678252"/>
+                  </a:lnTo>
+                  <a:lnTo>
+                    <a:pt x="2948071" y="2685368"/>
+                  </a:lnTo>
+                  <a:lnTo>
+                    <a:pt x="3019693" y="2692422"/>
+                  </a:lnTo>
+                  <a:lnTo>
+                    <a:pt x="3091316" y="2699414"/>
+                  </a:lnTo>
+                  <a:lnTo>
+                    <a:pt x="3162938" y="2706344"/>
+                  </a:lnTo>
+                  <a:lnTo>
+                    <a:pt x="3234561" y="2713212"/>
+                  </a:lnTo>
+                  <a:lnTo>
+                    <a:pt x="3306183" y="2720020"/>
+                  </a:lnTo>
+                  <a:lnTo>
+                    <a:pt x="3377806" y="2726768"/>
+                  </a:lnTo>
+                  <a:lnTo>
+                    <a:pt x="3449428" y="2733456"/>
+                  </a:lnTo>
+                  <a:lnTo>
+                    <a:pt x="3521051" y="2740085"/>
+                  </a:lnTo>
+                  <a:lnTo>
+                    <a:pt x="3592674" y="2746656"/>
+                  </a:lnTo>
+                  <a:lnTo>
+                    <a:pt x="3664296" y="2753168"/>
+                  </a:lnTo>
+                  <a:lnTo>
+                    <a:pt x="3735919" y="2759623"/>
+                  </a:lnTo>
+                  <a:lnTo>
+                    <a:pt x="3807541" y="2766021"/>
+                  </a:lnTo>
+                  <a:lnTo>
+                    <a:pt x="3879164" y="2772362"/>
+                  </a:lnTo>
+                  <a:lnTo>
+                    <a:pt x="3950786" y="2778647"/>
+                  </a:lnTo>
+                  <a:lnTo>
+                    <a:pt x="4022409" y="2784877"/>
+                  </a:lnTo>
+                  <a:lnTo>
+                    <a:pt x="4094031" y="2791052"/>
+                  </a:lnTo>
+                  <a:lnTo>
+                    <a:pt x="4165654" y="2797172"/>
+                  </a:lnTo>
+                  <a:lnTo>
+                    <a:pt x="4237276" y="2803238"/>
+                  </a:lnTo>
+                  <a:lnTo>
+                    <a:pt x="4308899" y="2809251"/>
+                  </a:lnTo>
+                  <a:lnTo>
+                    <a:pt x="4380521" y="2815210"/>
+                  </a:lnTo>
+                  <a:lnTo>
+                    <a:pt x="4452144" y="2821117"/>
+                  </a:lnTo>
+                  <a:lnTo>
+                    <a:pt x="4523766" y="2826971"/>
+                  </a:lnTo>
+                  <a:lnTo>
+                    <a:pt x="4595389" y="2832774"/>
+                  </a:lnTo>
+                  <a:lnTo>
+                    <a:pt x="4667011" y="2838526"/>
+                  </a:lnTo>
+                  <a:lnTo>
+                    <a:pt x="4738634" y="2844226"/>
+                  </a:lnTo>
+                  <a:lnTo>
+                    <a:pt x="4810256" y="2849877"/>
+                  </a:lnTo>
+                  <a:lnTo>
+                    <a:pt x="4881879" y="2855477"/>
+                  </a:lnTo>
+                  <a:lnTo>
+                    <a:pt x="4953502" y="2861028"/>
+                  </a:lnTo>
+                  <a:lnTo>
+                    <a:pt x="5025124" y="2866530"/>
+                  </a:lnTo>
+                  <a:lnTo>
+                    <a:pt x="5096747" y="2871983"/>
+                  </a:lnTo>
+                  <a:lnTo>
+                    <a:pt x="5168369" y="2877388"/>
+                  </a:lnTo>
+                  <a:lnTo>
+                    <a:pt x="5239992" y="2882746"/>
+                  </a:lnTo>
+                  <a:lnTo>
+                    <a:pt x="5311614" y="2888056"/>
+                  </a:lnTo>
+                  <a:lnTo>
+                    <a:pt x="5383237" y="2893319"/>
+                  </a:lnTo>
+                  <a:lnTo>
+                    <a:pt x="5454859" y="2898535"/>
+                  </a:lnTo>
+                  <a:lnTo>
+                    <a:pt x="5526482" y="2903706"/>
+                  </a:lnTo>
+                  <a:lnTo>
+                    <a:pt x="5598104" y="2908831"/>
+                  </a:lnTo>
+                  <a:lnTo>
+                    <a:pt x="5669727" y="2913910"/>
+                  </a:lnTo>
+                  <a:lnTo>
+                    <a:pt x="5741349" y="2918945"/>
+                  </a:lnTo>
+                  <a:lnTo>
+                    <a:pt x="5812972" y="2923935"/>
+                  </a:lnTo>
+                  <a:lnTo>
+                    <a:pt x="5884594" y="2928881"/>
+                  </a:lnTo>
+                  <a:lnTo>
+                    <a:pt x="5956217" y="2933784"/>
+                  </a:lnTo>
+                  <a:lnTo>
+                    <a:pt x="6027839" y="2938643"/>
+                  </a:lnTo>
+                  <a:lnTo>
+                    <a:pt x="6099462" y="2943459"/>
+                  </a:lnTo>
+                  <a:lnTo>
+                    <a:pt x="6171084" y="2948233"/>
+                  </a:lnTo>
+                  <a:lnTo>
+                    <a:pt x="6242707" y="2952964"/>
+                  </a:lnTo>
+                  <a:lnTo>
+                    <a:pt x="6314330" y="2957654"/>
                   </a:lnTo>
                 </a:path>
               </a:pathLst>
@@ -4328,309 +4328,309 @@
           </p:nvSpPr>
           <p:spPr>
             <a:xfrm>
-              <a:off x="1172049" y="4296340"/>
-              <a:ext cx="7090630" cy="1147669"/>
+              <a:off x="1172049" y="4290689"/>
+              <a:ext cx="7090630" cy="1154018"/>
             </a:xfrm>
             <a:custGeom>
               <a:avLst/>
               <a:pathLst>
-                <a:path w="7090630" h="1147669">
+                <a:path w="7090630" h="1154018">
                   <a:moveTo>
-                    <a:pt x="7090630" y="1147669"/>
+                    <a:pt x="7090630" y="1154018"/>
                   </a:moveTo>
                   <a:lnTo>
-                    <a:pt x="7019007" y="1143188"/>
-                  </a:lnTo>
-                  <a:lnTo>
-                    <a:pt x="6947385" y="1138529"/>
-                  </a:lnTo>
-                  <a:lnTo>
-                    <a:pt x="6875762" y="1133685"/>
-                  </a:lnTo>
-                  <a:lnTo>
-                    <a:pt x="6804139" y="1128650"/>
-                  </a:lnTo>
-                  <a:lnTo>
-                    <a:pt x="6732517" y="1123416"/>
-                  </a:lnTo>
-                  <a:lnTo>
-                    <a:pt x="6660894" y="1117975"/>
-                  </a:lnTo>
-                  <a:lnTo>
-                    <a:pt x="6589272" y="1112318"/>
-                  </a:lnTo>
-                  <a:lnTo>
-                    <a:pt x="6517649" y="1106437"/>
-                  </a:lnTo>
-                  <a:lnTo>
-                    <a:pt x="6446027" y="1100324"/>
-                  </a:lnTo>
-                  <a:lnTo>
-                    <a:pt x="6374404" y="1093968"/>
-                  </a:lnTo>
-                  <a:lnTo>
-                    <a:pt x="6302782" y="1087361"/>
-                  </a:lnTo>
-                  <a:lnTo>
-                    <a:pt x="6231159" y="1080493"/>
-                  </a:lnTo>
-                  <a:lnTo>
-                    <a:pt x="6159537" y="1073353"/>
-                  </a:lnTo>
-                  <a:lnTo>
-                    <a:pt x="6087914" y="1065930"/>
-                  </a:lnTo>
-                  <a:lnTo>
-                    <a:pt x="6016292" y="1058214"/>
-                  </a:lnTo>
-                  <a:lnTo>
-                    <a:pt x="5944669" y="1050192"/>
-                  </a:lnTo>
-                  <a:lnTo>
-                    <a:pt x="5873047" y="1041852"/>
-                  </a:lnTo>
-                  <a:lnTo>
-                    <a:pt x="5801424" y="1033183"/>
-                  </a:lnTo>
-                  <a:lnTo>
-                    <a:pt x="5729802" y="1024170"/>
-                  </a:lnTo>
-                  <a:lnTo>
-                    <a:pt x="5658179" y="1014801"/>
-                  </a:lnTo>
-                  <a:lnTo>
-                    <a:pt x="5586557" y="1005061"/>
-                  </a:lnTo>
-                  <a:lnTo>
-                    <a:pt x="5514934" y="994936"/>
-                  </a:lnTo>
-                  <a:lnTo>
-                    <a:pt x="5443311" y="984409"/>
-                  </a:lnTo>
-                  <a:lnTo>
-                    <a:pt x="5371689" y="973467"/>
-                  </a:lnTo>
-                  <a:lnTo>
-                    <a:pt x="5300066" y="962091"/>
-                  </a:lnTo>
-                  <a:lnTo>
-                    <a:pt x="5228444" y="950265"/>
-                  </a:lnTo>
-                  <a:lnTo>
-                    <a:pt x="5156821" y="937970"/>
-                  </a:lnTo>
-                  <a:lnTo>
-                    <a:pt x="5085199" y="925190"/>
-                  </a:lnTo>
-                  <a:lnTo>
-                    <a:pt x="5013576" y="911903"/>
-                  </a:lnTo>
-                  <a:lnTo>
-                    <a:pt x="4941954" y="898091"/>
-                  </a:lnTo>
-                  <a:lnTo>
-                    <a:pt x="4870331" y="883732"/>
-                  </a:lnTo>
-                  <a:lnTo>
-                    <a:pt x="4798709" y="868805"/>
-                  </a:lnTo>
-                  <a:lnTo>
-                    <a:pt x="4727086" y="853287"/>
-                  </a:lnTo>
-                  <a:lnTo>
-                    <a:pt x="4655464" y="837155"/>
-                  </a:lnTo>
-                  <a:lnTo>
-                    <a:pt x="4583841" y="820384"/>
-                  </a:lnTo>
-                  <a:lnTo>
-                    <a:pt x="4512219" y="802950"/>
-                  </a:lnTo>
-                  <a:lnTo>
-                    <a:pt x="4440596" y="784826"/>
-                  </a:lnTo>
-                  <a:lnTo>
-                    <a:pt x="4368974" y="765984"/>
-                  </a:lnTo>
-                  <a:lnTo>
-                    <a:pt x="4297351" y="746397"/>
-                  </a:lnTo>
-                  <a:lnTo>
-                    <a:pt x="4225729" y="726034"/>
-                  </a:lnTo>
-                  <a:lnTo>
-                    <a:pt x="4154106" y="704866"/>
-                  </a:lnTo>
-                  <a:lnTo>
-                    <a:pt x="4082483" y="682860"/>
-                  </a:lnTo>
-                  <a:lnTo>
-                    <a:pt x="4010861" y="659983"/>
-                  </a:lnTo>
-                  <a:lnTo>
-                    <a:pt x="3939238" y="636201"/>
-                  </a:lnTo>
-                  <a:lnTo>
-                    <a:pt x="3867616" y="611477"/>
-                  </a:lnTo>
-                  <a:lnTo>
-                    <a:pt x="3795993" y="585775"/>
-                  </a:lnTo>
-                  <a:lnTo>
-                    <a:pt x="3724371" y="559056"/>
-                  </a:lnTo>
-                  <a:lnTo>
-                    <a:pt x="3652748" y="531279"/>
-                  </a:lnTo>
-                  <a:lnTo>
-                    <a:pt x="3581126" y="502403"/>
-                  </a:lnTo>
-                  <a:lnTo>
-                    <a:pt x="3509503" y="472384"/>
-                  </a:lnTo>
-                  <a:lnTo>
-                    <a:pt x="3437881" y="441177"/>
-                  </a:lnTo>
-                  <a:lnTo>
-                    <a:pt x="3366258" y="426361"/>
-                  </a:lnTo>
-                  <a:lnTo>
-                    <a:pt x="3294636" y="419001"/>
-                  </a:lnTo>
-                  <a:lnTo>
-                    <a:pt x="3223013" y="411576"/>
-                  </a:lnTo>
-                  <a:lnTo>
-                    <a:pt x="3151391" y="404085"/>
-                  </a:lnTo>
-                  <a:lnTo>
-                    <a:pt x="3079768" y="396528"/>
-                  </a:lnTo>
-                  <a:lnTo>
-                    <a:pt x="3008146" y="388905"/>
-                  </a:lnTo>
-                  <a:lnTo>
-                    <a:pt x="2936523" y="381214"/>
-                  </a:lnTo>
-                  <a:lnTo>
-                    <a:pt x="2864901" y="373456"/>
-                  </a:lnTo>
-                  <a:lnTo>
-                    <a:pt x="2793278" y="365629"/>
-                  </a:lnTo>
-                  <a:lnTo>
-                    <a:pt x="2721655" y="357733"/>
-                  </a:lnTo>
-                  <a:lnTo>
-                    <a:pt x="2650033" y="349767"/>
-                  </a:lnTo>
-                  <a:lnTo>
-                    <a:pt x="2578410" y="341732"/>
-                  </a:lnTo>
-                  <a:lnTo>
-                    <a:pt x="2506788" y="333625"/>
-                  </a:lnTo>
-                  <a:lnTo>
-                    <a:pt x="2435165" y="325447"/>
-                  </a:lnTo>
-                  <a:lnTo>
-                    <a:pt x="2363543" y="317197"/>
-                  </a:lnTo>
-                  <a:lnTo>
-                    <a:pt x="2291920" y="308874"/>
-                  </a:lnTo>
-                  <a:lnTo>
-                    <a:pt x="2220298" y="300477"/>
-                  </a:lnTo>
-                  <a:lnTo>
-                    <a:pt x="2148675" y="292007"/>
-                  </a:lnTo>
-                  <a:lnTo>
-                    <a:pt x="2077053" y="283461"/>
-                  </a:lnTo>
-                  <a:lnTo>
-                    <a:pt x="2005430" y="274841"/>
-                  </a:lnTo>
-                  <a:lnTo>
-                    <a:pt x="1933808" y="266144"/>
-                  </a:lnTo>
-                  <a:lnTo>
-                    <a:pt x="1862185" y="257371"/>
-                  </a:lnTo>
-                  <a:lnTo>
-                    <a:pt x="1790563" y="248520"/>
-                  </a:lnTo>
-                  <a:lnTo>
-                    <a:pt x="1718940" y="239591"/>
-                  </a:lnTo>
-                  <a:lnTo>
-                    <a:pt x="1647318" y="230584"/>
-                  </a:lnTo>
-                  <a:lnTo>
-                    <a:pt x="1575695" y="221497"/>
-                  </a:lnTo>
-                  <a:lnTo>
-                    <a:pt x="1504073" y="212330"/>
-                  </a:lnTo>
-                  <a:lnTo>
-                    <a:pt x="1432450" y="203082"/>
-                  </a:lnTo>
-                  <a:lnTo>
-                    <a:pt x="1360827" y="193752"/>
-                  </a:lnTo>
-                  <a:lnTo>
-                    <a:pt x="1289205" y="184341"/>
-                  </a:lnTo>
-                  <a:lnTo>
-                    <a:pt x="1217582" y="174846"/>
-                  </a:lnTo>
-                  <a:lnTo>
-                    <a:pt x="1145960" y="165267"/>
-                  </a:lnTo>
-                  <a:lnTo>
-                    <a:pt x="1074337" y="155604"/>
-                  </a:lnTo>
-                  <a:lnTo>
-                    <a:pt x="1002715" y="145856"/>
-                  </a:lnTo>
-                  <a:lnTo>
-                    <a:pt x="931092" y="136022"/>
-                  </a:lnTo>
-                  <a:lnTo>
-                    <a:pt x="859470" y="126101"/>
-                  </a:lnTo>
-                  <a:lnTo>
-                    <a:pt x="787847" y="116093"/>
-                  </a:lnTo>
-                  <a:lnTo>
-                    <a:pt x="716225" y="105996"/>
-                  </a:lnTo>
-                  <a:lnTo>
-                    <a:pt x="644602" y="95810"/>
-                  </a:lnTo>
-                  <a:lnTo>
-                    <a:pt x="572980" y="85535"/>
-                  </a:lnTo>
-                  <a:lnTo>
-                    <a:pt x="501357" y="75168"/>
-                  </a:lnTo>
-                  <a:lnTo>
-                    <a:pt x="429735" y="64711"/>
-                  </a:lnTo>
-                  <a:lnTo>
-                    <a:pt x="358112" y="54161"/>
-                  </a:lnTo>
-                  <a:lnTo>
-                    <a:pt x="286490" y="43518"/>
-                  </a:lnTo>
-                  <a:lnTo>
-                    <a:pt x="214867" y="32781"/>
-                  </a:lnTo>
-                  <a:lnTo>
-                    <a:pt x="143245" y="21950"/>
-                  </a:lnTo>
-                  <a:lnTo>
-                    <a:pt x="71622" y="11023"/>
+                    <a:pt x="7019007" y="1149549"/>
+                  </a:lnTo>
+                  <a:lnTo>
+                    <a:pt x="6947385" y="1144904"/>
+                  </a:lnTo>
+                  <a:lnTo>
+                    <a:pt x="6875762" y="1140074"/>
+                  </a:lnTo>
+                  <a:lnTo>
+                    <a:pt x="6804139" y="1135052"/>
+                  </a:lnTo>
+                  <a:lnTo>
+                    <a:pt x="6732517" y="1129831"/>
+                  </a:lnTo>
+                  <a:lnTo>
+                    <a:pt x="6660894" y="1124403"/>
+                  </a:lnTo>
+                  <a:lnTo>
+                    <a:pt x="6589272" y="1118759"/>
+                  </a:lnTo>
+                  <a:lnTo>
+                    <a:pt x="6517649" y="1112891"/>
+                  </a:lnTo>
+                  <a:lnTo>
+                    <a:pt x="6446027" y="1106791"/>
+                  </a:lnTo>
+                  <a:lnTo>
+                    <a:pt x="6374404" y="1100447"/>
+                  </a:lnTo>
+                  <a:lnTo>
+                    <a:pt x="6302782" y="1093853"/>
+                  </a:lnTo>
+                  <a:lnTo>
+                    <a:pt x="6231159" y="1086996"/>
+                  </a:lnTo>
+                  <a:lnTo>
+                    <a:pt x="6159537" y="1079867"/>
+                  </a:lnTo>
+                  <a:lnTo>
+                    <a:pt x="6087914" y="1072455"/>
+                  </a:lnTo>
+                  <a:lnTo>
+                    <a:pt x="6016292" y="1064749"/>
+                  </a:lnTo>
+                  <a:lnTo>
+                    <a:pt x="5944669" y="1056737"/>
+                  </a:lnTo>
+                  <a:lnTo>
+                    <a:pt x="5873047" y="1048406"/>
+                  </a:lnTo>
+                  <a:lnTo>
+                    <a:pt x="5801424" y="1039745"/>
+                  </a:lnTo>
+                  <a:lnTo>
+                    <a:pt x="5729802" y="1030740"/>
+                  </a:lnTo>
+                  <a:lnTo>
+                    <a:pt x="5658179" y="1021378"/>
+                  </a:lnTo>
+                  <a:lnTo>
+                    <a:pt x="5586557" y="1011644"/>
+                  </a:lnTo>
+                  <a:lnTo>
+                    <a:pt x="5514934" y="1001523"/>
+                  </a:lnTo>
+                  <a:lnTo>
+                    <a:pt x="5443311" y="991001"/>
+                  </a:lnTo>
+                  <a:lnTo>
+                    <a:pt x="5371689" y="980061"/>
+                  </a:lnTo>
+                  <a:lnTo>
+                    <a:pt x="5300066" y="968687"/>
+                  </a:lnTo>
+                  <a:lnTo>
+                    <a:pt x="5228444" y="956861"/>
+                  </a:lnTo>
+                  <a:lnTo>
+                    <a:pt x="5156821" y="944565"/>
+                  </a:lnTo>
+                  <a:lnTo>
+                    <a:pt x="5085199" y="931782"/>
+                  </a:lnTo>
+                  <a:lnTo>
+                    <a:pt x="5013576" y="918490"/>
+                  </a:lnTo>
+                  <a:lnTo>
+                    <a:pt x="4941954" y="904672"/>
+                  </a:lnTo>
+                  <a:lnTo>
+                    <a:pt x="4870331" y="890304"/>
+                  </a:lnTo>
+                  <a:lnTo>
+                    <a:pt x="4798709" y="875366"/>
+                  </a:lnTo>
+                  <a:lnTo>
+                    <a:pt x="4727086" y="859835"/>
+                  </a:lnTo>
+                  <a:lnTo>
+                    <a:pt x="4655464" y="843688"/>
+                  </a:lnTo>
+                  <a:lnTo>
+                    <a:pt x="4583841" y="826899"/>
+                  </a:lnTo>
+                  <a:lnTo>
+                    <a:pt x="4512219" y="809444"/>
+                  </a:lnTo>
+                  <a:lnTo>
+                    <a:pt x="4440596" y="791296"/>
+                  </a:lnTo>
+                  <a:lnTo>
+                    <a:pt x="4368974" y="772427"/>
+                  </a:lnTo>
+                  <a:lnTo>
+                    <a:pt x="4297351" y="752809"/>
+                  </a:lnTo>
+                  <a:lnTo>
+                    <a:pt x="4225729" y="732413"/>
+                  </a:lnTo>
+                  <a:lnTo>
+                    <a:pt x="4154106" y="711206"/>
+                  </a:lnTo>
+                  <a:lnTo>
+                    <a:pt x="4082483" y="689158"/>
+                  </a:lnTo>
+                  <a:lnTo>
+                    <a:pt x="4010861" y="666234"/>
+                  </a:lnTo>
+                  <a:lnTo>
+                    <a:pt x="3939238" y="642401"/>
+                  </a:lnTo>
+                  <a:lnTo>
+                    <a:pt x="3867616" y="617621"/>
+                  </a:lnTo>
+                  <a:lnTo>
+                    <a:pt x="3795993" y="591857"/>
+                  </a:lnTo>
+                  <a:lnTo>
+                    <a:pt x="3724371" y="565070"/>
+                  </a:lnTo>
+                  <a:lnTo>
+                    <a:pt x="3652748" y="537220"/>
+                  </a:lnTo>
+                  <a:lnTo>
+                    <a:pt x="3581126" y="508264"/>
+                  </a:lnTo>
+                  <a:lnTo>
+                    <a:pt x="3509503" y="478159"/>
+                  </a:lnTo>
+                  <a:lnTo>
+                    <a:pt x="3437881" y="446858"/>
+                  </a:lnTo>
+                  <a:lnTo>
+                    <a:pt x="3366258" y="431957"/>
+                  </a:lnTo>
+                  <a:lnTo>
+                    <a:pt x="3294636" y="424518"/>
+                  </a:lnTo>
+                  <a:lnTo>
+                    <a:pt x="3223013" y="417012"/>
+                  </a:lnTo>
+                  <a:lnTo>
+                    <a:pt x="3151391" y="409439"/>
+                  </a:lnTo>
+                  <a:lnTo>
+                    <a:pt x="3079768" y="401798"/>
+                  </a:lnTo>
+                  <a:lnTo>
+                    <a:pt x="3008146" y="394090"/>
+                  </a:lnTo>
+                  <a:lnTo>
+                    <a:pt x="2936523" y="386313"/>
+                  </a:lnTo>
+                  <a:lnTo>
+                    <a:pt x="2864901" y="378466"/>
+                  </a:lnTo>
+                  <a:lnTo>
+                    <a:pt x="2793278" y="370549"/>
+                  </a:lnTo>
+                  <a:lnTo>
+                    <a:pt x="2721655" y="362562"/>
+                  </a:lnTo>
+                  <a:lnTo>
+                    <a:pt x="2650033" y="354504"/>
+                  </a:lnTo>
+                  <a:lnTo>
+                    <a:pt x="2578410" y="346374"/>
+                  </a:lnTo>
+                  <a:lnTo>
+                    <a:pt x="2506788" y="338171"/>
+                  </a:lnTo>
+                  <a:lnTo>
+                    <a:pt x="2435165" y="329896"/>
+                  </a:lnTo>
+                  <a:lnTo>
+                    <a:pt x="2363543" y="321546"/>
+                  </a:lnTo>
+                  <a:lnTo>
+                    <a:pt x="2291920" y="313122"/>
+                  </a:lnTo>
+                  <a:lnTo>
+                    <a:pt x="2220298" y="304623"/>
+                  </a:lnTo>
+                  <a:lnTo>
+                    <a:pt x="2148675" y="296049"/>
+                  </a:lnTo>
+                  <a:lnTo>
+                    <a:pt x="2077053" y="287397"/>
+                  </a:lnTo>
+                  <a:lnTo>
+                    <a:pt x="2005430" y="278669"/>
+                  </a:lnTo>
+                  <a:lnTo>
+                    <a:pt x="1933808" y="269863"/>
+                  </a:lnTo>
+                  <a:lnTo>
+                    <a:pt x="1862185" y="260978"/>
+                  </a:lnTo>
+                  <a:lnTo>
+                    <a:pt x="1790563" y="252014"/>
+                  </a:lnTo>
+                  <a:lnTo>
+                    <a:pt x="1718940" y="242971"/>
+                  </a:lnTo>
+                  <a:lnTo>
+                    <a:pt x="1647318" y="233846"/>
+                  </a:lnTo>
+                  <a:lnTo>
+                    <a:pt x="1575695" y="224641"/>
+                  </a:lnTo>
+                  <a:lnTo>
+                    <a:pt x="1504073" y="215353"/>
+                  </a:lnTo>
+                  <a:lnTo>
+                    <a:pt x="1432450" y="205982"/>
+                  </a:lnTo>
+                  <a:lnTo>
+                    <a:pt x="1360827" y="196528"/>
+                  </a:lnTo>
+                  <a:lnTo>
+                    <a:pt x="1289205" y="186990"/>
+                  </a:lnTo>
+                  <a:lnTo>
+                    <a:pt x="1217582" y="177367"/>
+                  </a:lnTo>
+                  <a:lnTo>
+                    <a:pt x="1145960" y="167658"/>
+                  </a:lnTo>
+                  <a:lnTo>
+                    <a:pt x="1074337" y="157862"/>
+                  </a:lnTo>
+                  <a:lnTo>
+                    <a:pt x="1002715" y="147979"/>
+                  </a:lnTo>
+                  <a:lnTo>
+                    <a:pt x="931092" y="138008"/>
+                  </a:lnTo>
+                  <a:lnTo>
+                    <a:pt x="859470" y="127948"/>
+                  </a:lnTo>
+                  <a:lnTo>
+                    <a:pt x="787847" y="117798"/>
+                  </a:lnTo>
+                  <a:lnTo>
+                    <a:pt x="716225" y="107558"/>
+                  </a:lnTo>
+                  <a:lnTo>
+                    <a:pt x="644602" y="97227"/>
+                  </a:lnTo>
+                  <a:lnTo>
+                    <a:pt x="572980" y="86803"/>
+                  </a:lnTo>
+                  <a:lnTo>
+                    <a:pt x="501357" y="76287"/>
+                  </a:lnTo>
+                  <a:lnTo>
+                    <a:pt x="429735" y="65676"/>
+                  </a:lnTo>
+                  <a:lnTo>
+                    <a:pt x="358112" y="54972"/>
+                  </a:lnTo>
+                  <a:lnTo>
+                    <a:pt x="286490" y="44172"/>
+                  </a:lnTo>
+                  <a:lnTo>
+                    <a:pt x="214867" y="33275"/>
+                  </a:lnTo>
+                  <a:lnTo>
+                    <a:pt x="143245" y="22282"/>
+                  </a:lnTo>
+                  <a:lnTo>
+                    <a:pt x="71622" y="11190"/>
                   </a:lnTo>
                   <a:lnTo>
                     <a:pt x="0" y="0"/>
@@ -4653,312 +4653,312 @@
           </p:nvSpPr>
           <p:spPr>
             <a:xfrm>
-              <a:off x="1172049" y="2976596"/>
-              <a:ext cx="7090630" cy="2335986"/>
+              <a:off x="1172049" y="2963380"/>
+              <a:ext cx="7090630" cy="2350543"/>
             </a:xfrm>
             <a:custGeom>
               <a:avLst/>
               <a:pathLst>
-                <a:path w="7090630" h="2335986">
+                <a:path w="7090630" h="2350543">
                   <a:moveTo>
                     <a:pt x="0" y="0"/>
                   </a:moveTo>
                   <a:lnTo>
-                    <a:pt x="71622" y="60686"/>
-                  </a:lnTo>
-                  <a:lnTo>
-                    <a:pt x="143245" y="119946"/>
-                  </a:lnTo>
-                  <a:lnTo>
-                    <a:pt x="214867" y="177812"/>
-                  </a:lnTo>
-                  <a:lnTo>
-                    <a:pt x="286490" y="234317"/>
-                  </a:lnTo>
-                  <a:lnTo>
-                    <a:pt x="358112" y="289494"/>
-                  </a:lnTo>
-                  <a:lnTo>
-                    <a:pt x="429735" y="343373"/>
-                  </a:lnTo>
-                  <a:lnTo>
-                    <a:pt x="501357" y="395985"/>
-                  </a:lnTo>
-                  <a:lnTo>
-                    <a:pt x="572980" y="447360"/>
-                  </a:lnTo>
-                  <a:lnTo>
-                    <a:pt x="644602" y="497527"/>
-                  </a:lnTo>
-                  <a:lnTo>
-                    <a:pt x="716225" y="546513"/>
-                  </a:lnTo>
-                  <a:lnTo>
-                    <a:pt x="787847" y="594348"/>
-                  </a:lnTo>
-                  <a:lnTo>
-                    <a:pt x="859470" y="641058"/>
-                  </a:lnTo>
-                  <a:lnTo>
-                    <a:pt x="931092" y="686670"/>
-                  </a:lnTo>
-                  <a:lnTo>
-                    <a:pt x="1002715" y="731209"/>
-                  </a:lnTo>
-                  <a:lnTo>
-                    <a:pt x="1074337" y="774701"/>
-                  </a:lnTo>
-                  <a:lnTo>
-                    <a:pt x="1145960" y="817170"/>
-                  </a:lnTo>
-                  <a:lnTo>
-                    <a:pt x="1217582" y="858640"/>
-                  </a:lnTo>
-                  <a:lnTo>
-                    <a:pt x="1289205" y="899135"/>
-                  </a:lnTo>
-                  <a:lnTo>
-                    <a:pt x="1360827" y="938677"/>
-                  </a:lnTo>
-                  <a:lnTo>
-                    <a:pt x="1432450" y="977290"/>
-                  </a:lnTo>
-                  <a:lnTo>
-                    <a:pt x="1504073" y="1014995"/>
-                  </a:lnTo>
-                  <a:lnTo>
-                    <a:pt x="1575695" y="1051813"/>
-                  </a:lnTo>
-                  <a:lnTo>
-                    <a:pt x="1647318" y="1087765"/>
-                  </a:lnTo>
-                  <a:lnTo>
-                    <a:pt x="1718940" y="1122872"/>
-                  </a:lnTo>
-                  <a:lnTo>
-                    <a:pt x="1790563" y="1157153"/>
-                  </a:lnTo>
-                  <a:lnTo>
-                    <a:pt x="1862185" y="1190629"/>
-                  </a:lnTo>
-                  <a:lnTo>
-                    <a:pt x="1933808" y="1223316"/>
-                  </a:lnTo>
-                  <a:lnTo>
-                    <a:pt x="2005430" y="1255236"/>
-                  </a:lnTo>
-                  <a:lnTo>
-                    <a:pt x="2077053" y="1286404"/>
-                  </a:lnTo>
-                  <a:lnTo>
-                    <a:pt x="2148675" y="1316840"/>
-                  </a:lnTo>
-                  <a:lnTo>
-                    <a:pt x="2220298" y="1346560"/>
-                  </a:lnTo>
-                  <a:lnTo>
-                    <a:pt x="2291920" y="1375581"/>
-                  </a:lnTo>
-                  <a:lnTo>
-                    <a:pt x="2363543" y="1403919"/>
-                  </a:lnTo>
-                  <a:lnTo>
-                    <a:pt x="2435165" y="1431592"/>
-                  </a:lnTo>
-                  <a:lnTo>
-                    <a:pt x="2506788" y="1458613"/>
-                  </a:lnTo>
-                  <a:lnTo>
-                    <a:pt x="2578410" y="1484999"/>
-                  </a:lnTo>
-                  <a:lnTo>
-                    <a:pt x="2650033" y="1510764"/>
-                  </a:lnTo>
-                  <a:lnTo>
-                    <a:pt x="2721655" y="1535924"/>
-                  </a:lnTo>
-                  <a:lnTo>
-                    <a:pt x="2793278" y="1560492"/>
-                  </a:lnTo>
-                  <a:lnTo>
-                    <a:pt x="2864901" y="1584482"/>
-                  </a:lnTo>
-                  <a:lnTo>
-                    <a:pt x="2936523" y="1607908"/>
-                  </a:lnTo>
-                  <a:lnTo>
-                    <a:pt x="3008146" y="1630783"/>
-                  </a:lnTo>
-                  <a:lnTo>
-                    <a:pt x="3079768" y="1653120"/>
-                  </a:lnTo>
-                  <a:lnTo>
-                    <a:pt x="3151391" y="1674932"/>
-                  </a:lnTo>
-                  <a:lnTo>
-                    <a:pt x="3223013" y="1696231"/>
-                  </a:lnTo>
-                  <a:lnTo>
-                    <a:pt x="3294636" y="1717029"/>
-                  </a:lnTo>
-                  <a:lnTo>
-                    <a:pt x="3366258" y="1737338"/>
-                  </a:lnTo>
-                  <a:lnTo>
-                    <a:pt x="3437881" y="1757170"/>
-                  </a:lnTo>
-                  <a:lnTo>
-                    <a:pt x="3509503" y="1776535"/>
-                  </a:lnTo>
-                  <a:lnTo>
-                    <a:pt x="3581126" y="1795445"/>
-                  </a:lnTo>
-                  <a:lnTo>
-                    <a:pt x="3652748" y="1813910"/>
-                  </a:lnTo>
-                  <a:lnTo>
-                    <a:pt x="3724371" y="1831940"/>
-                  </a:lnTo>
-                  <a:lnTo>
-                    <a:pt x="3795993" y="1849547"/>
-                  </a:lnTo>
-                  <a:lnTo>
-                    <a:pt x="3867616" y="1866740"/>
-                  </a:lnTo>
-                  <a:lnTo>
-                    <a:pt x="3939238" y="1883528"/>
-                  </a:lnTo>
-                  <a:lnTo>
-                    <a:pt x="4010861" y="1899922"/>
-                  </a:lnTo>
-                  <a:lnTo>
-                    <a:pt x="4082483" y="1915930"/>
-                  </a:lnTo>
-                  <a:lnTo>
-                    <a:pt x="4154106" y="1931562"/>
-                  </a:lnTo>
-                  <a:lnTo>
-                    <a:pt x="4225729" y="1946826"/>
-                  </a:lnTo>
-                  <a:lnTo>
-                    <a:pt x="4297351" y="1961731"/>
-                  </a:lnTo>
-                  <a:lnTo>
-                    <a:pt x="4368974" y="1976285"/>
-                  </a:lnTo>
-                  <a:lnTo>
-                    <a:pt x="4440596" y="1990498"/>
-                  </a:lnTo>
-                  <a:lnTo>
-                    <a:pt x="4512219" y="2004376"/>
-                  </a:lnTo>
-                  <a:lnTo>
-                    <a:pt x="4583841" y="2017928"/>
-                  </a:lnTo>
-                  <a:lnTo>
-                    <a:pt x="4655464" y="2031161"/>
-                  </a:lnTo>
-                  <a:lnTo>
-                    <a:pt x="4727086" y="2044083"/>
-                  </a:lnTo>
-                  <a:lnTo>
-                    <a:pt x="4798709" y="2056701"/>
-                  </a:lnTo>
-                  <a:lnTo>
-                    <a:pt x="4870331" y="2069022"/>
-                  </a:lnTo>
-                  <a:lnTo>
-                    <a:pt x="4941954" y="2081054"/>
-                  </a:lnTo>
-                  <a:lnTo>
-                    <a:pt x="5013576" y="2092802"/>
-                  </a:lnTo>
-                  <a:lnTo>
-                    <a:pt x="5085199" y="2104274"/>
-                  </a:lnTo>
-                  <a:lnTo>
-                    <a:pt x="5156821" y="2115477"/>
-                  </a:lnTo>
-                  <a:lnTo>
-                    <a:pt x="5228444" y="2126416"/>
-                  </a:lnTo>
-                  <a:lnTo>
-                    <a:pt x="5300066" y="2137098"/>
-                  </a:lnTo>
-                  <a:lnTo>
-                    <a:pt x="5371689" y="2147529"/>
-                  </a:lnTo>
-                  <a:lnTo>
-                    <a:pt x="5443311" y="2157714"/>
-                  </a:lnTo>
-                  <a:lnTo>
-                    <a:pt x="5514934" y="2167660"/>
-                  </a:lnTo>
-                  <a:lnTo>
-                    <a:pt x="5586557" y="2177372"/>
-                  </a:lnTo>
-                  <a:lnTo>
-                    <a:pt x="5658179" y="2186855"/>
-                  </a:lnTo>
-                  <a:lnTo>
-                    <a:pt x="5729802" y="2196116"/>
-                  </a:lnTo>
-                  <a:lnTo>
-                    <a:pt x="5801424" y="2205159"/>
-                  </a:lnTo>
-                  <a:lnTo>
-                    <a:pt x="5873047" y="2213989"/>
-                  </a:lnTo>
-                  <a:lnTo>
-                    <a:pt x="5944669" y="2222611"/>
-                  </a:lnTo>
-                  <a:lnTo>
-                    <a:pt x="6016292" y="2231031"/>
-                  </a:lnTo>
-                  <a:lnTo>
-                    <a:pt x="6087914" y="2239253"/>
-                  </a:lnTo>
-                  <a:lnTo>
-                    <a:pt x="6159537" y="2247281"/>
-                  </a:lnTo>
-                  <a:lnTo>
-                    <a:pt x="6231159" y="2255121"/>
-                  </a:lnTo>
-                  <a:lnTo>
-                    <a:pt x="6302782" y="2262776"/>
-                  </a:lnTo>
-                  <a:lnTo>
-                    <a:pt x="6374404" y="2270251"/>
-                  </a:lnTo>
-                  <a:lnTo>
-                    <a:pt x="6446027" y="2277551"/>
-                  </a:lnTo>
-                  <a:lnTo>
-                    <a:pt x="6517649" y="2284678"/>
-                  </a:lnTo>
-                  <a:lnTo>
-                    <a:pt x="6589272" y="2291639"/>
-                  </a:lnTo>
-                  <a:lnTo>
-                    <a:pt x="6660894" y="2298435"/>
-                  </a:lnTo>
-                  <a:lnTo>
-                    <a:pt x="6732517" y="2305072"/>
-                  </a:lnTo>
-                  <a:lnTo>
-                    <a:pt x="6804139" y="2311552"/>
-                  </a:lnTo>
-                  <a:lnTo>
-                    <a:pt x="6875762" y="2317880"/>
-                  </a:lnTo>
-                  <a:lnTo>
-                    <a:pt x="6947385" y="2324060"/>
-                  </a:lnTo>
-                  <a:lnTo>
-                    <a:pt x="7019007" y="2330094"/>
-                  </a:lnTo>
-                  <a:lnTo>
-                    <a:pt x="7090630" y="2335986"/>
+                    <a:pt x="71622" y="61268"/>
+                  </a:lnTo>
+                  <a:lnTo>
+                    <a:pt x="143245" y="121090"/>
+                  </a:lnTo>
+                  <a:lnTo>
+                    <a:pt x="214867" y="179499"/>
+                  </a:lnTo>
+                  <a:lnTo>
+                    <a:pt x="286490" y="236528"/>
+                  </a:lnTo>
+                  <a:lnTo>
+                    <a:pt x="358112" y="292210"/>
+                  </a:lnTo>
+                  <a:lnTo>
+                    <a:pt x="429735" y="346576"/>
+                  </a:lnTo>
+                  <a:lnTo>
+                    <a:pt x="501357" y="399659"/>
+                  </a:lnTo>
+                  <a:lnTo>
+                    <a:pt x="572980" y="451487"/>
+                  </a:lnTo>
+                  <a:lnTo>
+                    <a:pt x="644602" y="502092"/>
+                  </a:lnTo>
+                  <a:lnTo>
+                    <a:pt x="716225" y="551501"/>
+                  </a:lnTo>
+                  <a:lnTo>
+                    <a:pt x="787847" y="599743"/>
+                  </a:lnTo>
+                  <a:lnTo>
+                    <a:pt x="859470" y="646846"/>
+                  </a:lnTo>
+                  <a:lnTo>
+                    <a:pt x="931092" y="692836"/>
+                  </a:lnTo>
+                  <a:lnTo>
+                    <a:pt x="1002715" y="737739"/>
+                  </a:lnTo>
+                  <a:lnTo>
+                    <a:pt x="1074337" y="781582"/>
+                  </a:lnTo>
+                  <a:lnTo>
+                    <a:pt x="1145960" y="824390"/>
+                  </a:lnTo>
+                  <a:lnTo>
+                    <a:pt x="1217582" y="866186"/>
+                  </a:lnTo>
+                  <a:lnTo>
+                    <a:pt x="1289205" y="906995"/>
+                  </a:lnTo>
+                  <a:lnTo>
+                    <a:pt x="1360827" y="946840"/>
+                  </a:lnTo>
+                  <a:lnTo>
+                    <a:pt x="1432450" y="985744"/>
+                  </a:lnTo>
+                  <a:lnTo>
+                    <a:pt x="1504073" y="1023729"/>
+                  </a:lnTo>
+                  <a:lnTo>
+                    <a:pt x="1575695" y="1060816"/>
+                  </a:lnTo>
+                  <a:lnTo>
+                    <a:pt x="1647318" y="1097028"/>
+                  </a:lnTo>
+                  <a:lnTo>
+                    <a:pt x="1718940" y="1132384"/>
+                  </a:lnTo>
+                  <a:lnTo>
+                    <a:pt x="1790563" y="1166906"/>
+                  </a:lnTo>
+                  <a:lnTo>
+                    <a:pt x="1862185" y="1200611"/>
+                  </a:lnTo>
+                  <a:lnTo>
+                    <a:pt x="1933808" y="1233521"/>
+                  </a:lnTo>
+                  <a:lnTo>
+                    <a:pt x="2005430" y="1265653"/>
+                  </a:lnTo>
+                  <a:lnTo>
+                    <a:pt x="2077053" y="1297027"/>
+                  </a:lnTo>
+                  <a:lnTo>
+                    <a:pt x="2148675" y="1327659"/>
+                  </a:lnTo>
+                  <a:lnTo>
+                    <a:pt x="2220298" y="1357568"/>
+                  </a:lnTo>
+                  <a:lnTo>
+                    <a:pt x="2291920" y="1386770"/>
+                  </a:lnTo>
+                  <a:lnTo>
+                    <a:pt x="2363543" y="1415282"/>
+                  </a:lnTo>
+                  <a:lnTo>
+                    <a:pt x="2435165" y="1443121"/>
+                  </a:lnTo>
+                  <a:lnTo>
+                    <a:pt x="2506788" y="1470303"/>
+                  </a:lnTo>
+                  <a:lnTo>
+                    <a:pt x="2578410" y="1496842"/>
+                  </a:lnTo>
+                  <a:lnTo>
+                    <a:pt x="2650033" y="1522755"/>
+                  </a:lnTo>
+                  <a:lnTo>
+                    <a:pt x="2721655" y="1548055"/>
+                  </a:lnTo>
+                  <a:lnTo>
+                    <a:pt x="2793278" y="1572758"/>
+                  </a:lnTo>
+                  <a:lnTo>
+                    <a:pt x="2864901" y="1596877"/>
+                  </a:lnTo>
+                  <a:lnTo>
+                    <a:pt x="2936523" y="1620427"/>
+                  </a:lnTo>
+                  <a:lnTo>
+                    <a:pt x="3008146" y="1643420"/>
+                  </a:lnTo>
+                  <a:lnTo>
+                    <a:pt x="3079768" y="1665870"/>
+                  </a:lnTo>
+                  <a:lnTo>
+                    <a:pt x="3151391" y="1687790"/>
+                  </a:lnTo>
+                  <a:lnTo>
+                    <a:pt x="3223013" y="1709192"/>
+                  </a:lnTo>
+                  <a:lnTo>
+                    <a:pt x="3294636" y="1730089"/>
+                  </a:lnTo>
+                  <a:lnTo>
+                    <a:pt x="3366258" y="1750492"/>
+                  </a:lnTo>
+                  <a:lnTo>
+                    <a:pt x="3437881" y="1770413"/>
+                  </a:lnTo>
+                  <a:lnTo>
+                    <a:pt x="3509503" y="1789864"/>
+                  </a:lnTo>
+                  <a:lnTo>
+                    <a:pt x="3581126" y="1808855"/>
+                  </a:lnTo>
+                  <a:lnTo>
+                    <a:pt x="3652748" y="1827397"/>
+                  </a:lnTo>
+                  <a:lnTo>
+                    <a:pt x="3724371" y="1845502"/>
+                  </a:lnTo>
+                  <a:lnTo>
+                    <a:pt x="3795993" y="1863179"/>
+                  </a:lnTo>
+                  <a:lnTo>
+                    <a:pt x="3867616" y="1880438"/>
+                  </a:lnTo>
+                  <a:lnTo>
+                    <a:pt x="3939238" y="1897290"/>
+                  </a:lnTo>
+                  <a:lnTo>
+                    <a:pt x="4010861" y="1913744"/>
+                  </a:lnTo>
+                  <a:lnTo>
+                    <a:pt x="4082483" y="1929809"/>
+                  </a:lnTo>
+                  <a:lnTo>
+                    <a:pt x="4154106" y="1945494"/>
+                  </a:lnTo>
+                  <a:lnTo>
+                    <a:pt x="4225729" y="1960809"/>
+                  </a:lnTo>
+                  <a:lnTo>
+                    <a:pt x="4297351" y="1975763"/>
+                  </a:lnTo>
+                  <a:lnTo>
+                    <a:pt x="4368974" y="1990363"/>
+                  </a:lnTo>
+                  <a:lnTo>
+                    <a:pt x="4440596" y="2004618"/>
+                  </a:lnTo>
+                  <a:lnTo>
+                    <a:pt x="4512219" y="2018536"/>
+                  </a:lnTo>
+                  <a:lnTo>
+                    <a:pt x="4583841" y="2032126"/>
+                  </a:lnTo>
+                  <a:lnTo>
+                    <a:pt x="4655464" y="2045395"/>
+                  </a:lnTo>
+                  <a:lnTo>
+                    <a:pt x="4727086" y="2058350"/>
+                  </a:lnTo>
+                  <a:lnTo>
+                    <a:pt x="4798709" y="2070999"/>
+                  </a:lnTo>
+                  <a:lnTo>
+                    <a:pt x="4870331" y="2083350"/>
+                  </a:lnTo>
+                  <a:lnTo>
+                    <a:pt x="4941954" y="2095409"/>
+                  </a:lnTo>
+                  <a:lnTo>
+                    <a:pt x="5013576" y="2107183"/>
+                  </a:lnTo>
+                  <a:lnTo>
+                    <a:pt x="5085199" y="2118679"/>
+                  </a:lnTo>
+                  <a:lnTo>
+                    <a:pt x="5156821" y="2129903"/>
+                  </a:lnTo>
+                  <a:lnTo>
+                    <a:pt x="5228444" y="2140862"/>
+                  </a:lnTo>
+                  <a:lnTo>
+                    <a:pt x="5300066" y="2151562"/>
+                  </a:lnTo>
+                  <a:lnTo>
+                    <a:pt x="5371689" y="2162010"/>
+                  </a:lnTo>
+                  <a:lnTo>
+                    <a:pt x="5443311" y="2172211"/>
+                  </a:lnTo>
+                  <a:lnTo>
+                    <a:pt x="5514934" y="2182171"/>
+                  </a:lnTo>
+                  <a:lnTo>
+                    <a:pt x="5586557" y="2191895"/>
+                  </a:lnTo>
+                  <a:lnTo>
+                    <a:pt x="5658179" y="2201390"/>
+                  </a:lnTo>
+                  <a:lnTo>
+                    <a:pt x="5729802" y="2210661"/>
+                  </a:lnTo>
+                  <a:lnTo>
+                    <a:pt x="5801424" y="2219712"/>
+                  </a:lnTo>
+                  <a:lnTo>
+                    <a:pt x="5873047" y="2228550"/>
+                  </a:lnTo>
+                  <a:lnTo>
+                    <a:pt x="5944669" y="2237179"/>
+                  </a:lnTo>
+                  <a:lnTo>
+                    <a:pt x="6016292" y="2245604"/>
+                  </a:lnTo>
+                  <a:lnTo>
+                    <a:pt x="6087914" y="2253831"/>
+                  </a:lnTo>
+                  <a:lnTo>
+                    <a:pt x="6159537" y="2261863"/>
+                  </a:lnTo>
+                  <a:lnTo>
+                    <a:pt x="6231159" y="2269705"/>
+                  </a:lnTo>
+                  <a:lnTo>
+                    <a:pt x="6302782" y="2277362"/>
+                  </a:lnTo>
+                  <a:lnTo>
+                    <a:pt x="6374404" y="2284838"/>
+                  </a:lnTo>
+                  <a:lnTo>
+                    <a:pt x="6446027" y="2292137"/>
+                  </a:lnTo>
+                  <a:lnTo>
+                    <a:pt x="6517649" y="2299265"/>
+                  </a:lnTo>
+                  <a:lnTo>
+                    <a:pt x="6589272" y="2306223"/>
+                  </a:lnTo>
+                  <a:lnTo>
+                    <a:pt x="6660894" y="2313018"/>
+                  </a:lnTo>
+                  <a:lnTo>
+                    <a:pt x="6732517" y="2319652"/>
+                  </a:lnTo>
+                  <a:lnTo>
+                    <a:pt x="6804139" y="2326129"/>
+                  </a:lnTo>
+                  <a:lnTo>
+                    <a:pt x="6875762" y="2332453"/>
+                  </a:lnTo>
+                  <a:lnTo>
+                    <a:pt x="6947385" y="2338628"/>
+                  </a:lnTo>
+                  <a:lnTo>
+                    <a:pt x="7019007" y="2344657"/>
+                  </a:lnTo>
+                  <a:lnTo>
+                    <a:pt x="7090630" y="2350543"/>
                   </a:lnTo>
                 </a:path>
               </a:pathLst>
@@ -5842,7 +5842,7 @@
                   <a:latin typeface="Helvetica"/>
                   <a:cs typeface="Helvetica"/>
                 </a:rPr>
-                <a:t>subHR per 10 % decline: 1.33 (1.11-1.59), p = 0.002  |  per IQR decline (Δ = 29.3 %): 2.31 (1.36-3.92)  |  IQR: [-14.6, 14.7] %</a:t>
+                <a:t>subHR per 10 % decline: 1.33 (1.11-1.60), p = 0.002  |  per IQR decline (Δ = 29.3 %): 2.32 (1.37-3.93)  |  IQR: [-14.6, 14.7] %</a:t>
               </a:r>
             </a:p>
           </p:txBody>
